--- a/ОВЧ-ЭКЗ/Итоговые работы/3952_Теддер_Д_ОхлаждениеКомпьютерныхСистем_Презентация.pptx
+++ b/ОВЧ-ЭКЗ/Итоговые работы/3952_Теддер_Д_ОхлаждениеКомпьютерныхСистем_Презентация.pptx
@@ -4889,32 +4889,49 @@
                             </p:childTnLst>
                           </p:cTn>
                         </p:par>
-                      </p:childTnLst>
-                    </p:cTn>
-                  </p:par>
-                  <p:par>
-                    <p:cTn id="7" fill="hold">
-                      <p:stCondLst>
-                        <p:cond delay="indefinite"/>
-                      </p:stCondLst>
-                      <p:childTnLst>
                         <p:par>
-                          <p:cTn id="8" fill="hold">
+                          <p:cTn id="7" fill="hold">
                             <p:stCondLst>
                               <p:cond delay="0"/>
                             </p:stCondLst>
                             <p:childTnLst>
                               <p:par>
-                                <p:cTn id="9" presetID="10" presetClass="entr" presetSubtype="0" fill="hold" nodeType="clickEffect">
+                                <p:cTn id="8" presetID="10" presetClass="entr" presetSubtype="0" fill="hold" nodeType="afterEffect">
                                   <p:stCondLst>
                                     <p:cond delay="0"/>
                                   </p:stCondLst>
                                   <p:childTnLst>
                                     <p:animEffect transition="in" filter="fade">
                                       <p:cBhvr>
-                                        <p:cTn id="10" dur="450"/>
+                                        <p:cTn id="9" dur="450"/>
                                         <p:tgtEl>
                                           <p:spTgt spid="4"/>
+                                        </p:tgtEl>
+                                      </p:cBhvr>
+                                    </p:animEffect>
+                                  </p:childTnLst>
+                                </p:cTn>
+                              </p:par>
+                            </p:childTnLst>
+                          </p:cTn>
+                        </p:par>
+                        <p:par>
+                          <p:cTn id="10" fill="hold">
+                            <p:stCondLst>
+                              <p:cond delay="0"/>
+                            </p:stCondLst>
+                            <p:childTnLst>
+                              <p:par>
+                                <p:cTn id="11" presetID="10" presetClass="entr" presetSubtype="0" fill="hold" nodeType="afterEffect">
+                                  <p:stCondLst>
+                                    <p:cond delay="0"/>
+                                  </p:stCondLst>
+                                  <p:childTnLst>
+                                    <p:animEffect transition="in" filter="fade">
+                                      <p:cBhvr>
+                                        <p:cTn id="12" dur="450"/>
+                                        <p:tgtEl>
+                                          <p:spTgt spid="7"/>
                                         </p:tgtEl>
                                       </p:cBhvr>
                                     </p:animEffect>
@@ -4928,26 +4945,26 @@
                     </p:cTn>
                   </p:par>
                   <p:par>
-                    <p:cTn id="11" fill="hold">
+                    <p:cTn id="13" fill="hold">
                       <p:stCondLst>
                         <p:cond delay="indefinite"/>
                       </p:stCondLst>
                       <p:childTnLst>
                         <p:par>
-                          <p:cTn id="12" fill="hold">
+                          <p:cTn id="14" fill="hold">
                             <p:stCondLst>
                               <p:cond delay="0"/>
                             </p:stCondLst>
                             <p:childTnLst>
                               <p:par>
-                                <p:cTn id="13" presetID="10" presetClass="entr" presetSubtype="0" fill="hold" nodeType="clickEffect">
+                                <p:cTn id="15" presetID="10" presetClass="entr" presetSubtype="0" fill="hold" nodeType="clickEffect">
                                   <p:stCondLst>
                                     <p:cond delay="0"/>
                                   </p:stCondLst>
                                   <p:childTnLst>
                                     <p:animEffect transition="in" filter="fade">
                                       <p:cBhvr>
-                                        <p:cTn id="14" dur="450"/>
+                                        <p:cTn id="16" dur="450"/>
                                         <p:tgtEl>
                                           <p:spTgt spid="5"/>
                                         </p:tgtEl>
@@ -4963,63 +4980,28 @@
                     </p:cTn>
                   </p:par>
                   <p:par>
-                    <p:cTn id="15" fill="hold">
+                    <p:cTn id="17" fill="hold">
                       <p:stCondLst>
                         <p:cond delay="indefinite"/>
                       </p:stCondLst>
                       <p:childTnLst>
                         <p:par>
-                          <p:cTn id="16" fill="hold">
+                          <p:cTn id="18" fill="hold">
                             <p:stCondLst>
                               <p:cond delay="0"/>
                             </p:stCondLst>
                             <p:childTnLst>
                               <p:par>
-                                <p:cTn id="17" presetID="10" presetClass="entr" presetSubtype="0" fill="hold" nodeType="clickEffect">
+                                <p:cTn id="19" presetID="10" presetClass="entr" presetSubtype="0" fill="hold" nodeType="clickEffect">
                                   <p:stCondLst>
                                     <p:cond delay="0"/>
                                   </p:stCondLst>
                                   <p:childTnLst>
                                     <p:animEffect transition="in" filter="fade">
                                       <p:cBhvr>
-                                        <p:cTn id="18" dur="450"/>
+                                        <p:cTn id="20" dur="450"/>
                                         <p:tgtEl>
                                           <p:spTgt spid="6"/>
-                                        </p:tgtEl>
-                                      </p:cBhvr>
-                                    </p:animEffect>
-                                  </p:childTnLst>
-                                </p:cTn>
-                              </p:par>
-                            </p:childTnLst>
-                          </p:cTn>
-                        </p:par>
-                      </p:childTnLst>
-                    </p:cTn>
-                  </p:par>
-                  <p:par>
-                    <p:cTn id="19" fill="hold">
-                      <p:stCondLst>
-                        <p:cond delay="indefinite"/>
-                      </p:stCondLst>
-                      <p:childTnLst>
-                        <p:par>
-                          <p:cTn id="20" fill="hold">
-                            <p:stCondLst>
-                              <p:cond delay="0"/>
-                            </p:stCondLst>
-                            <p:childTnLst>
-                              <p:par>
-                                <p:cTn id="21" presetID="10" presetClass="entr" presetSubtype="0" fill="hold" nodeType="clickEffect">
-                                  <p:stCondLst>
-                                    <p:cond delay="0"/>
-                                  </p:stCondLst>
-                                  <p:childTnLst>
-                                    <p:animEffect transition="in" filter="fade">
-                                      <p:cBhvr>
-                                        <p:cTn id="22" dur="450"/>
-                                        <p:tgtEl>
-                                          <p:spTgt spid="7"/>
                                         </p:tgtEl>
                                       </p:cBhvr>
                                     </p:animEffect>
@@ -5637,30 +5619,21 @@
                             </p:childTnLst>
                           </p:cTn>
                         </p:par>
-                      </p:childTnLst>
-                    </p:cTn>
-                  </p:par>
-                  <p:par>
-                    <p:cTn id="7" fill="hold">
-                      <p:stCondLst>
-                        <p:cond delay="indefinite"/>
-                      </p:stCondLst>
-                      <p:childTnLst>
                         <p:par>
-                          <p:cTn id="8" fill="hold">
+                          <p:cTn id="7" fill="hold">
                             <p:stCondLst>
                               <p:cond delay="0"/>
                             </p:stCondLst>
                             <p:childTnLst>
                               <p:par>
-                                <p:cTn id="9" presetID="10" presetClass="entr" presetSubtype="0" fill="hold" nodeType="clickEffect">
+                                <p:cTn id="8" presetID="10" presetClass="entr" presetSubtype="0" fill="hold" nodeType="afterEffect">
                                   <p:stCondLst>
                                     <p:cond delay="0"/>
                                   </p:stCondLst>
                                   <p:childTnLst>
                                     <p:animEffect transition="in" filter="fade">
                                       <p:cBhvr>
-                                        <p:cTn id="10" dur="450"/>
+                                        <p:cTn id="9" dur="450"/>
                                         <p:tgtEl>
                                           <p:spTgt spid="4"/>
                                         </p:tgtEl>
@@ -5676,26 +5649,26 @@
                     </p:cTn>
                   </p:par>
                   <p:par>
-                    <p:cTn id="11" fill="hold">
+                    <p:cTn id="10" fill="hold">
                       <p:stCondLst>
                         <p:cond delay="indefinite"/>
                       </p:stCondLst>
                       <p:childTnLst>
                         <p:par>
-                          <p:cTn id="12" fill="hold">
+                          <p:cTn id="11" fill="hold">
                             <p:stCondLst>
                               <p:cond delay="0"/>
                             </p:stCondLst>
                             <p:childTnLst>
                               <p:par>
-                                <p:cTn id="13" presetID="10" presetClass="entr" presetSubtype="0" fill="hold" nodeType="clickEffect">
+                                <p:cTn id="12" presetID="10" presetClass="entr" presetSubtype="0" fill="hold" nodeType="clickEffect">
                                   <p:stCondLst>
                                     <p:cond delay="0"/>
                                   </p:stCondLst>
                                   <p:childTnLst>
                                     <p:animEffect transition="in" filter="fade">
                                       <p:cBhvr>
-                                        <p:cTn id="14" dur="450"/>
+                                        <p:cTn id="13" dur="450"/>
                                         <p:tgtEl>
                                           <p:spTgt spid="5"/>
                                         </p:tgtEl>
@@ -5711,26 +5684,26 @@
                     </p:cTn>
                   </p:par>
                   <p:par>
-                    <p:cTn id="15" fill="hold">
+                    <p:cTn id="14" fill="hold">
                       <p:stCondLst>
                         <p:cond delay="indefinite"/>
                       </p:stCondLst>
                       <p:childTnLst>
                         <p:par>
-                          <p:cTn id="16" fill="hold">
+                          <p:cTn id="15" fill="hold">
                             <p:stCondLst>
                               <p:cond delay="0"/>
                             </p:stCondLst>
                             <p:childTnLst>
                               <p:par>
-                                <p:cTn id="17" presetID="10" presetClass="entr" presetSubtype="0" fill="hold" nodeType="clickEffect">
+                                <p:cTn id="16" presetID="10" presetClass="entr" presetSubtype="0" fill="hold" nodeType="clickEffect">
                                   <p:stCondLst>
                                     <p:cond delay="0"/>
                                   </p:stCondLst>
                                   <p:childTnLst>
                                     <p:animEffect transition="in" filter="fade">
                                       <p:cBhvr>
-                                        <p:cTn id="18" dur="450"/>
+                                        <p:cTn id="17" dur="450"/>
                                         <p:tgtEl>
                                           <p:spTgt spid="6"/>
                                         </p:tgtEl>
@@ -5746,26 +5719,26 @@
                     </p:cTn>
                   </p:par>
                   <p:par>
-                    <p:cTn id="19" fill="hold">
+                    <p:cTn id="18" fill="hold">
                       <p:stCondLst>
                         <p:cond delay="indefinite"/>
                       </p:stCondLst>
                       <p:childTnLst>
                         <p:par>
-                          <p:cTn id="20" fill="hold">
+                          <p:cTn id="19" fill="hold">
                             <p:stCondLst>
                               <p:cond delay="0"/>
                             </p:stCondLst>
                             <p:childTnLst>
                               <p:par>
-                                <p:cTn id="21" presetID="10" presetClass="entr" presetSubtype="0" fill="hold" nodeType="clickEffect">
+                                <p:cTn id="20" presetID="10" presetClass="entr" presetSubtype="0" fill="hold" nodeType="clickEffect">
                                   <p:stCondLst>
                                     <p:cond delay="0"/>
                                   </p:stCondLst>
                                   <p:childTnLst>
                                     <p:animEffect transition="in" filter="fade">
                                       <p:cBhvr>
-                                        <p:cTn id="22" dur="450"/>
+                                        <p:cTn id="21" dur="450"/>
                                         <p:tgtEl>
                                           <p:spTgt spid="7"/>
                                         </p:tgtEl>
@@ -8313,30 +8286,56 @@
                             </p:childTnLst>
                           </p:cTn>
                         </p:par>
-                      </p:childTnLst>
-                    </p:cTn>
-                  </p:par>
-                  <p:par>
-                    <p:cTn id="7" fill="hold">
-                      <p:stCondLst>
-                        <p:cond delay="indefinite"/>
-                      </p:stCondLst>
-                      <p:childTnLst>
                         <p:par>
-                          <p:cTn id="8" fill="hold">
+                          <p:cTn id="7" fill="hold">
                             <p:stCondLst>
                               <p:cond delay="0"/>
                             </p:stCondLst>
                             <p:childTnLst>
                               <p:par>
-                                <p:cTn id="9" presetID="10" presetClass="entr" presetSubtype="0" fill="hold" nodeType="clickEffect">
+                                <p:cTn id="8" presetID="10" presetClass="entr" presetSubtype="0" fill="hold" nodeType="afterEffect">
                                   <p:stCondLst>
                                     <p:cond delay="0"/>
                                   </p:stCondLst>
                                   <p:childTnLst>
                                     <p:animEffect transition="in" filter="fade">
                                       <p:cBhvr>
-                                        <p:cTn id="10" dur="450"/>
+                                        <p:cTn id="9" dur="450"/>
+                                        <p:tgtEl>
+                                          <p:spTgt spid="8"/>
+                                        </p:tgtEl>
+                                      </p:cBhvr>
+                                    </p:animEffect>
+                                  </p:childTnLst>
+                                </p:cTn>
+                              </p:par>
+                            </p:childTnLst>
+                          </p:cTn>
+                        </p:par>
+                      </p:childTnLst>
+                    </p:cTn>
+                  </p:par>
+                  <p:par>
+                    <p:cTn id="10" fill="hold">
+                      <p:stCondLst>
+                        <p:cond delay="indefinite"/>
+                      </p:stCondLst>
+                      <p:childTnLst>
+                        <p:par>
+                          <p:cTn id="11" fill="hold">
+                            <p:stCondLst>
+                              <p:cond delay="0"/>
+                            </p:stCondLst>
+                            <p:childTnLst>
+                              <p:par>
+                                <p:cTn id="12" presetID="10" presetClass="entr" presetSubtype="0" fill="hold" nodeType="clickEffect">
+                                  <p:stCondLst>
+                                    <p:cond delay="0"/>
+                                  </p:stCondLst>
+                                  <p:childTnLst>
+                                    <p:animEffect transition="in" filter="fade">
+                                      <p:cBhvr>
+                                        <p:cTn id="13" dur="450"/>
                                         <p:tgtEl>
                                           <p:spTgt spid="4"/>
                                         </p:tgtEl>
@@ -8352,26 +8351,26 @@
                     </p:cTn>
                   </p:par>
                   <p:par>
-                    <p:cTn id="11" fill="hold">
+                    <p:cTn id="14" fill="hold">
                       <p:stCondLst>
                         <p:cond delay="indefinite"/>
                       </p:stCondLst>
                       <p:childTnLst>
                         <p:par>
-                          <p:cTn id="12" fill="hold">
+                          <p:cTn id="15" fill="hold">
                             <p:stCondLst>
                               <p:cond delay="0"/>
                             </p:stCondLst>
                             <p:childTnLst>
                               <p:par>
-                                <p:cTn id="13" presetID="10" presetClass="entr" presetSubtype="0" fill="hold" nodeType="clickEffect">
+                                <p:cTn id="16" presetID="10" presetClass="entr" presetSubtype="0" fill="hold" nodeType="clickEffect">
                                   <p:stCondLst>
                                     <p:cond delay="0"/>
                                   </p:stCondLst>
                                   <p:childTnLst>
                                     <p:animEffect transition="in" filter="fade">
                                       <p:cBhvr>
-                                        <p:cTn id="14" dur="450"/>
+                                        <p:cTn id="17" dur="450"/>
                                         <p:tgtEl>
                                           <p:spTgt spid="5"/>
                                         </p:tgtEl>
@@ -8387,26 +8386,26 @@
                     </p:cTn>
                   </p:par>
                   <p:par>
-                    <p:cTn id="15" fill="hold">
+                    <p:cTn id="18" fill="hold">
                       <p:stCondLst>
                         <p:cond delay="indefinite"/>
                       </p:stCondLst>
                       <p:childTnLst>
                         <p:par>
-                          <p:cTn id="16" fill="hold">
+                          <p:cTn id="19" fill="hold">
                             <p:stCondLst>
                               <p:cond delay="0"/>
                             </p:stCondLst>
                             <p:childTnLst>
                               <p:par>
-                                <p:cTn id="17" presetID="10" presetClass="entr" presetSubtype="0" fill="hold" nodeType="clickEffect">
+                                <p:cTn id="20" presetID="10" presetClass="entr" presetSubtype="0" fill="hold" nodeType="clickEffect">
                                   <p:stCondLst>
                                     <p:cond delay="0"/>
                                   </p:stCondLst>
                                   <p:childTnLst>
                                     <p:animEffect transition="in" filter="fade">
                                       <p:cBhvr>
-                                        <p:cTn id="18" dur="450"/>
+                                        <p:cTn id="21" dur="450"/>
                                         <p:tgtEl>
                                           <p:spTgt spid="6"/>
                                         </p:tgtEl>
@@ -8422,63 +8421,28 @@
                     </p:cTn>
                   </p:par>
                   <p:par>
-                    <p:cTn id="19" fill="hold">
+                    <p:cTn id="22" fill="hold">
                       <p:stCondLst>
                         <p:cond delay="indefinite"/>
                       </p:stCondLst>
                       <p:childTnLst>
                         <p:par>
-                          <p:cTn id="20" fill="hold">
+                          <p:cTn id="23" fill="hold">
                             <p:stCondLst>
                               <p:cond delay="0"/>
                             </p:stCondLst>
                             <p:childTnLst>
                               <p:par>
-                                <p:cTn id="21" presetID="10" presetClass="entr" presetSubtype="0" fill="hold" nodeType="clickEffect">
+                                <p:cTn id="24" presetID="10" presetClass="entr" presetSubtype="0" fill="hold" nodeType="clickEffect">
                                   <p:stCondLst>
                                     <p:cond delay="0"/>
                                   </p:stCondLst>
                                   <p:childTnLst>
                                     <p:animEffect transition="in" filter="fade">
                                       <p:cBhvr>
-                                        <p:cTn id="22" dur="450"/>
+                                        <p:cTn id="25" dur="450"/>
                                         <p:tgtEl>
                                           <p:spTgt spid="7"/>
-                                        </p:tgtEl>
-                                      </p:cBhvr>
-                                    </p:animEffect>
-                                  </p:childTnLst>
-                                </p:cTn>
-                              </p:par>
-                            </p:childTnLst>
-                          </p:cTn>
-                        </p:par>
-                      </p:childTnLst>
-                    </p:cTn>
-                  </p:par>
-                  <p:par>
-                    <p:cTn id="23" fill="hold">
-                      <p:stCondLst>
-                        <p:cond delay="indefinite"/>
-                      </p:stCondLst>
-                      <p:childTnLst>
-                        <p:par>
-                          <p:cTn id="24" fill="hold">
-                            <p:stCondLst>
-                              <p:cond delay="0"/>
-                            </p:stCondLst>
-                            <p:childTnLst>
-                              <p:par>
-                                <p:cTn id="25" presetID="10" presetClass="entr" presetSubtype="0" fill="hold" nodeType="clickEffect">
-                                  <p:stCondLst>
-                                    <p:cond delay="0"/>
-                                  </p:stCondLst>
-                                  <p:childTnLst>
-                                    <p:animEffect transition="in" filter="fade">
-                                      <p:cBhvr>
-                                        <p:cTn id="26" dur="450"/>
-                                        <p:tgtEl>
-                                          <p:spTgt spid="8"/>
                                         </p:tgtEl>
                                       </p:cBhvr>
                                     </p:animEffect>
@@ -8845,30 +8809,56 @@
                             </p:childTnLst>
                           </p:cTn>
                         </p:par>
-                      </p:childTnLst>
-                    </p:cTn>
-                  </p:par>
-                  <p:par>
-                    <p:cTn id="7" fill="hold">
-                      <p:stCondLst>
-                        <p:cond delay="indefinite"/>
-                      </p:stCondLst>
-                      <p:childTnLst>
                         <p:par>
-                          <p:cTn id="8" fill="hold">
+                          <p:cTn id="7" fill="hold">
                             <p:stCondLst>
                               <p:cond delay="0"/>
                             </p:stCondLst>
                             <p:childTnLst>
                               <p:par>
-                                <p:cTn id="9" presetID="10" presetClass="entr" presetSubtype="0" fill="hold" nodeType="clickEffect">
+                                <p:cTn id="8" presetID="10" presetClass="entr" presetSubtype="0" fill="hold" nodeType="afterEffect">
                                   <p:stCondLst>
                                     <p:cond delay="0"/>
                                   </p:stCondLst>
                                   <p:childTnLst>
                                     <p:animEffect transition="in" filter="fade">
                                       <p:cBhvr>
-                                        <p:cTn id="10" dur="450"/>
+                                        <p:cTn id="9" dur="450"/>
+                                        <p:tgtEl>
+                                          <p:spTgt spid="8"/>
+                                        </p:tgtEl>
+                                      </p:cBhvr>
+                                    </p:animEffect>
+                                  </p:childTnLst>
+                                </p:cTn>
+                              </p:par>
+                            </p:childTnLst>
+                          </p:cTn>
+                        </p:par>
+                      </p:childTnLst>
+                    </p:cTn>
+                  </p:par>
+                  <p:par>
+                    <p:cTn id="10" fill="hold">
+                      <p:stCondLst>
+                        <p:cond delay="indefinite"/>
+                      </p:stCondLst>
+                      <p:childTnLst>
+                        <p:par>
+                          <p:cTn id="11" fill="hold">
+                            <p:stCondLst>
+                              <p:cond delay="0"/>
+                            </p:stCondLst>
+                            <p:childTnLst>
+                              <p:par>
+                                <p:cTn id="12" presetID="10" presetClass="entr" presetSubtype="0" fill="hold" nodeType="clickEffect">
+                                  <p:stCondLst>
+                                    <p:cond delay="0"/>
+                                  </p:stCondLst>
+                                  <p:childTnLst>
+                                    <p:animEffect transition="in" filter="fade">
+                                      <p:cBhvr>
+                                        <p:cTn id="13" dur="450"/>
                                         <p:tgtEl>
                                           <p:spTgt spid="4"/>
                                         </p:tgtEl>
@@ -8884,26 +8874,26 @@
                     </p:cTn>
                   </p:par>
                   <p:par>
-                    <p:cTn id="11" fill="hold">
+                    <p:cTn id="14" fill="hold">
                       <p:stCondLst>
                         <p:cond delay="indefinite"/>
                       </p:stCondLst>
                       <p:childTnLst>
                         <p:par>
-                          <p:cTn id="12" fill="hold">
+                          <p:cTn id="15" fill="hold">
                             <p:stCondLst>
                               <p:cond delay="0"/>
                             </p:stCondLst>
                             <p:childTnLst>
                               <p:par>
-                                <p:cTn id="13" presetID="10" presetClass="entr" presetSubtype="0" fill="hold" nodeType="clickEffect">
+                                <p:cTn id="16" presetID="10" presetClass="entr" presetSubtype="0" fill="hold" nodeType="clickEffect">
                                   <p:stCondLst>
                                     <p:cond delay="0"/>
                                   </p:stCondLst>
                                   <p:childTnLst>
                                     <p:animEffect transition="in" filter="fade">
                                       <p:cBhvr>
-                                        <p:cTn id="14" dur="450"/>
+                                        <p:cTn id="17" dur="450"/>
                                         <p:tgtEl>
                                           <p:spTgt spid="5"/>
                                         </p:tgtEl>
@@ -8919,26 +8909,26 @@
                     </p:cTn>
                   </p:par>
                   <p:par>
-                    <p:cTn id="15" fill="hold">
+                    <p:cTn id="18" fill="hold">
                       <p:stCondLst>
                         <p:cond delay="indefinite"/>
                       </p:stCondLst>
                       <p:childTnLst>
                         <p:par>
-                          <p:cTn id="16" fill="hold">
+                          <p:cTn id="19" fill="hold">
                             <p:stCondLst>
                               <p:cond delay="0"/>
                             </p:stCondLst>
                             <p:childTnLst>
                               <p:par>
-                                <p:cTn id="17" presetID="10" presetClass="entr" presetSubtype="0" fill="hold" nodeType="clickEffect">
+                                <p:cTn id="20" presetID="10" presetClass="entr" presetSubtype="0" fill="hold" nodeType="clickEffect">
                                   <p:stCondLst>
                                     <p:cond delay="0"/>
                                   </p:stCondLst>
                                   <p:childTnLst>
                                     <p:animEffect transition="in" filter="fade">
                                       <p:cBhvr>
-                                        <p:cTn id="18" dur="450"/>
+                                        <p:cTn id="21" dur="450"/>
                                         <p:tgtEl>
                                           <p:spTgt spid="6"/>
                                         </p:tgtEl>
@@ -8954,63 +8944,28 @@
                     </p:cTn>
                   </p:par>
                   <p:par>
-                    <p:cTn id="19" fill="hold">
+                    <p:cTn id="22" fill="hold">
                       <p:stCondLst>
                         <p:cond delay="indefinite"/>
                       </p:stCondLst>
                       <p:childTnLst>
                         <p:par>
-                          <p:cTn id="20" fill="hold">
+                          <p:cTn id="23" fill="hold">
                             <p:stCondLst>
                               <p:cond delay="0"/>
                             </p:stCondLst>
                             <p:childTnLst>
                               <p:par>
-                                <p:cTn id="21" presetID="10" presetClass="entr" presetSubtype="0" fill="hold" nodeType="clickEffect">
+                                <p:cTn id="24" presetID="10" presetClass="entr" presetSubtype="0" fill="hold" nodeType="clickEffect">
                                   <p:stCondLst>
                                     <p:cond delay="0"/>
                                   </p:stCondLst>
                                   <p:childTnLst>
                                     <p:animEffect transition="in" filter="fade">
                                       <p:cBhvr>
-                                        <p:cTn id="22" dur="450"/>
+                                        <p:cTn id="25" dur="450"/>
                                         <p:tgtEl>
                                           <p:spTgt spid="7"/>
-                                        </p:tgtEl>
-                                      </p:cBhvr>
-                                    </p:animEffect>
-                                  </p:childTnLst>
-                                </p:cTn>
-                              </p:par>
-                            </p:childTnLst>
-                          </p:cTn>
-                        </p:par>
-                      </p:childTnLst>
-                    </p:cTn>
-                  </p:par>
-                  <p:par>
-                    <p:cTn id="23" fill="hold">
-                      <p:stCondLst>
-                        <p:cond delay="indefinite"/>
-                      </p:stCondLst>
-                      <p:childTnLst>
-                        <p:par>
-                          <p:cTn id="24" fill="hold">
-                            <p:stCondLst>
-                              <p:cond delay="0"/>
-                            </p:stCondLst>
-                            <p:childTnLst>
-                              <p:par>
-                                <p:cTn id="25" presetID="10" presetClass="entr" presetSubtype="0" fill="hold" nodeType="clickEffect">
-                                  <p:stCondLst>
-                                    <p:cond delay="0"/>
-                                  </p:stCondLst>
-                                  <p:childTnLst>
-                                    <p:animEffect transition="in" filter="fade">
-                                      <p:cBhvr>
-                                        <p:cTn id="26" dur="450"/>
-                                        <p:tgtEl>
-                                          <p:spTgt spid="8"/>
                                         </p:tgtEl>
                                       </p:cBhvr>
                                     </p:animEffect>
@@ -9377,30 +9332,56 @@
                             </p:childTnLst>
                           </p:cTn>
                         </p:par>
-                      </p:childTnLst>
-                    </p:cTn>
-                  </p:par>
-                  <p:par>
-                    <p:cTn id="7" fill="hold">
-                      <p:stCondLst>
-                        <p:cond delay="indefinite"/>
-                      </p:stCondLst>
-                      <p:childTnLst>
                         <p:par>
-                          <p:cTn id="8" fill="hold">
+                          <p:cTn id="7" fill="hold">
                             <p:stCondLst>
                               <p:cond delay="0"/>
                             </p:stCondLst>
                             <p:childTnLst>
                               <p:par>
-                                <p:cTn id="9" presetID="10" presetClass="entr" presetSubtype="0" fill="hold" nodeType="clickEffect">
+                                <p:cTn id="8" presetID="10" presetClass="entr" presetSubtype="0" fill="hold" nodeType="afterEffect">
                                   <p:stCondLst>
                                     <p:cond delay="0"/>
                                   </p:stCondLst>
                                   <p:childTnLst>
                                     <p:animEffect transition="in" filter="fade">
                                       <p:cBhvr>
-                                        <p:cTn id="10" dur="450"/>
+                                        <p:cTn id="9" dur="450"/>
+                                        <p:tgtEl>
+                                          <p:spTgt spid="8"/>
+                                        </p:tgtEl>
+                                      </p:cBhvr>
+                                    </p:animEffect>
+                                  </p:childTnLst>
+                                </p:cTn>
+                              </p:par>
+                            </p:childTnLst>
+                          </p:cTn>
+                        </p:par>
+                      </p:childTnLst>
+                    </p:cTn>
+                  </p:par>
+                  <p:par>
+                    <p:cTn id="10" fill="hold">
+                      <p:stCondLst>
+                        <p:cond delay="indefinite"/>
+                      </p:stCondLst>
+                      <p:childTnLst>
+                        <p:par>
+                          <p:cTn id="11" fill="hold">
+                            <p:stCondLst>
+                              <p:cond delay="0"/>
+                            </p:stCondLst>
+                            <p:childTnLst>
+                              <p:par>
+                                <p:cTn id="12" presetID="10" presetClass="entr" presetSubtype="0" fill="hold" nodeType="clickEffect">
+                                  <p:stCondLst>
+                                    <p:cond delay="0"/>
+                                  </p:stCondLst>
+                                  <p:childTnLst>
+                                    <p:animEffect transition="in" filter="fade">
+                                      <p:cBhvr>
+                                        <p:cTn id="13" dur="450"/>
                                         <p:tgtEl>
                                           <p:spTgt spid="4"/>
                                         </p:tgtEl>
@@ -9416,26 +9397,26 @@
                     </p:cTn>
                   </p:par>
                   <p:par>
-                    <p:cTn id="11" fill="hold">
+                    <p:cTn id="14" fill="hold">
                       <p:stCondLst>
                         <p:cond delay="indefinite"/>
                       </p:stCondLst>
                       <p:childTnLst>
                         <p:par>
-                          <p:cTn id="12" fill="hold">
+                          <p:cTn id="15" fill="hold">
                             <p:stCondLst>
                               <p:cond delay="0"/>
                             </p:stCondLst>
                             <p:childTnLst>
                               <p:par>
-                                <p:cTn id="13" presetID="10" presetClass="entr" presetSubtype="0" fill="hold" nodeType="clickEffect">
+                                <p:cTn id="16" presetID="10" presetClass="entr" presetSubtype="0" fill="hold" nodeType="clickEffect">
                                   <p:stCondLst>
                                     <p:cond delay="0"/>
                                   </p:stCondLst>
                                   <p:childTnLst>
                                     <p:animEffect transition="in" filter="fade">
                                       <p:cBhvr>
-                                        <p:cTn id="14" dur="450"/>
+                                        <p:cTn id="17" dur="450"/>
                                         <p:tgtEl>
                                           <p:spTgt spid="5"/>
                                         </p:tgtEl>
@@ -9451,26 +9432,26 @@
                     </p:cTn>
                   </p:par>
                   <p:par>
-                    <p:cTn id="15" fill="hold">
+                    <p:cTn id="18" fill="hold">
                       <p:stCondLst>
                         <p:cond delay="indefinite"/>
                       </p:stCondLst>
                       <p:childTnLst>
                         <p:par>
-                          <p:cTn id="16" fill="hold">
+                          <p:cTn id="19" fill="hold">
                             <p:stCondLst>
                               <p:cond delay="0"/>
                             </p:stCondLst>
                             <p:childTnLst>
                               <p:par>
-                                <p:cTn id="17" presetID="10" presetClass="entr" presetSubtype="0" fill="hold" nodeType="clickEffect">
+                                <p:cTn id="20" presetID="10" presetClass="entr" presetSubtype="0" fill="hold" nodeType="clickEffect">
                                   <p:stCondLst>
                                     <p:cond delay="0"/>
                                   </p:stCondLst>
                                   <p:childTnLst>
                                     <p:animEffect transition="in" filter="fade">
                                       <p:cBhvr>
-                                        <p:cTn id="18" dur="450"/>
+                                        <p:cTn id="21" dur="450"/>
                                         <p:tgtEl>
                                           <p:spTgt spid="6"/>
                                         </p:tgtEl>
@@ -9486,63 +9467,28 @@
                     </p:cTn>
                   </p:par>
                   <p:par>
-                    <p:cTn id="19" fill="hold">
+                    <p:cTn id="22" fill="hold">
                       <p:stCondLst>
                         <p:cond delay="indefinite"/>
                       </p:stCondLst>
                       <p:childTnLst>
                         <p:par>
-                          <p:cTn id="20" fill="hold">
+                          <p:cTn id="23" fill="hold">
                             <p:stCondLst>
                               <p:cond delay="0"/>
                             </p:stCondLst>
                             <p:childTnLst>
                               <p:par>
-                                <p:cTn id="21" presetID="10" presetClass="entr" presetSubtype="0" fill="hold" nodeType="clickEffect">
+                                <p:cTn id="24" presetID="10" presetClass="entr" presetSubtype="0" fill="hold" nodeType="clickEffect">
                                   <p:stCondLst>
                                     <p:cond delay="0"/>
                                   </p:stCondLst>
                                   <p:childTnLst>
                                     <p:animEffect transition="in" filter="fade">
                                       <p:cBhvr>
-                                        <p:cTn id="22" dur="450"/>
+                                        <p:cTn id="25" dur="450"/>
                                         <p:tgtEl>
                                           <p:spTgt spid="7"/>
-                                        </p:tgtEl>
-                                      </p:cBhvr>
-                                    </p:animEffect>
-                                  </p:childTnLst>
-                                </p:cTn>
-                              </p:par>
-                            </p:childTnLst>
-                          </p:cTn>
-                        </p:par>
-                      </p:childTnLst>
-                    </p:cTn>
-                  </p:par>
-                  <p:par>
-                    <p:cTn id="23" fill="hold">
-                      <p:stCondLst>
-                        <p:cond delay="indefinite"/>
-                      </p:stCondLst>
-                      <p:childTnLst>
-                        <p:par>
-                          <p:cTn id="24" fill="hold">
-                            <p:stCondLst>
-                              <p:cond delay="0"/>
-                            </p:stCondLst>
-                            <p:childTnLst>
-                              <p:par>
-                                <p:cTn id="25" presetID="10" presetClass="entr" presetSubtype="0" fill="hold" nodeType="clickEffect">
-                                  <p:stCondLst>
-                                    <p:cond delay="0"/>
-                                  </p:stCondLst>
-                                  <p:childTnLst>
-                                    <p:animEffect transition="in" filter="fade">
-                                      <p:cBhvr>
-                                        <p:cTn id="26" dur="450"/>
-                                        <p:tgtEl>
-                                          <p:spTgt spid="8"/>
                                         </p:tgtEl>
                                       </p:cBhvr>
                                     </p:animEffect>
@@ -10455,30 +10401,21 @@
                             </p:childTnLst>
                           </p:cTn>
                         </p:par>
-                      </p:childTnLst>
-                    </p:cTn>
-                  </p:par>
-                  <p:par>
-                    <p:cTn id="7" fill="hold">
-                      <p:stCondLst>
-                        <p:cond delay="indefinite"/>
-                      </p:stCondLst>
-                      <p:childTnLst>
                         <p:par>
-                          <p:cTn id="8" fill="hold">
+                          <p:cTn id="7" fill="hold">
                             <p:stCondLst>
                               <p:cond delay="0"/>
                             </p:stCondLst>
                             <p:childTnLst>
                               <p:par>
-                                <p:cTn id="9" presetID="10" presetClass="entr" presetSubtype="0" fill="hold" nodeType="clickEffect">
+                                <p:cTn id="8" presetID="10" presetClass="entr" presetSubtype="0" fill="hold" nodeType="afterEffect">
                                   <p:stCondLst>
                                     <p:cond delay="0"/>
                                   </p:stCondLst>
                                   <p:childTnLst>
                                     <p:animEffect transition="in" filter="fade">
                                       <p:cBhvr>
-                                        <p:cTn id="10" dur="450"/>
+                                        <p:cTn id="9" dur="450"/>
                                         <p:tgtEl>
                                           <p:spTgt spid="4"/>
                                         </p:tgtEl>
@@ -10494,26 +10431,26 @@
                     </p:cTn>
                   </p:par>
                   <p:par>
-                    <p:cTn id="11" fill="hold">
+                    <p:cTn id="10" fill="hold">
                       <p:stCondLst>
                         <p:cond delay="indefinite"/>
                       </p:stCondLst>
                       <p:childTnLst>
                         <p:par>
-                          <p:cTn id="12" fill="hold">
+                          <p:cTn id="11" fill="hold">
                             <p:stCondLst>
                               <p:cond delay="0"/>
                             </p:stCondLst>
                             <p:childTnLst>
                               <p:par>
-                                <p:cTn id="13" presetID="10" presetClass="entr" presetSubtype="0" fill="hold" nodeType="clickEffect">
+                                <p:cTn id="12" presetID="10" presetClass="entr" presetSubtype="0" fill="hold" nodeType="clickEffect">
                                   <p:stCondLst>
                                     <p:cond delay="0"/>
                                   </p:stCondLst>
                                   <p:childTnLst>
                                     <p:animEffect transition="in" filter="fade">
                                       <p:cBhvr>
-                                        <p:cTn id="14" dur="450"/>
+                                        <p:cTn id="13" dur="450"/>
                                         <p:tgtEl>
                                           <p:spTgt spid="5"/>
                                         </p:tgtEl>
@@ -10930,30 +10867,56 @@
                             </p:childTnLst>
                           </p:cTn>
                         </p:par>
-                      </p:childTnLst>
-                    </p:cTn>
-                  </p:par>
-                  <p:par>
-                    <p:cTn id="7" fill="hold">
-                      <p:stCondLst>
-                        <p:cond delay="indefinite"/>
-                      </p:stCondLst>
-                      <p:childTnLst>
                         <p:par>
-                          <p:cTn id="8" fill="hold">
+                          <p:cTn id="7" fill="hold">
                             <p:stCondLst>
                               <p:cond delay="0"/>
                             </p:stCondLst>
                             <p:childTnLst>
                               <p:par>
-                                <p:cTn id="9" presetID="10" presetClass="entr" presetSubtype="0" fill="hold" nodeType="clickEffect">
+                                <p:cTn id="8" presetID="10" presetClass="entr" presetSubtype="0" fill="hold" nodeType="afterEffect">
                                   <p:stCondLst>
                                     <p:cond delay="0"/>
                                   </p:stCondLst>
                                   <p:childTnLst>
                                     <p:animEffect transition="in" filter="fade">
                                       <p:cBhvr>
-                                        <p:cTn id="10" dur="450"/>
+                                        <p:cTn id="9" dur="450"/>
+                                        <p:tgtEl>
+                                          <p:spTgt spid="9"/>
+                                        </p:tgtEl>
+                                      </p:cBhvr>
+                                    </p:animEffect>
+                                  </p:childTnLst>
+                                </p:cTn>
+                              </p:par>
+                            </p:childTnLst>
+                          </p:cTn>
+                        </p:par>
+                      </p:childTnLst>
+                    </p:cTn>
+                  </p:par>
+                  <p:par>
+                    <p:cTn id="10" fill="hold">
+                      <p:stCondLst>
+                        <p:cond delay="indefinite"/>
+                      </p:stCondLst>
+                      <p:childTnLst>
+                        <p:par>
+                          <p:cTn id="11" fill="hold">
+                            <p:stCondLst>
+                              <p:cond delay="0"/>
+                            </p:stCondLst>
+                            <p:childTnLst>
+                              <p:par>
+                                <p:cTn id="12" presetID="10" presetClass="entr" presetSubtype="0" fill="hold" nodeType="clickEffect">
+                                  <p:stCondLst>
+                                    <p:cond delay="0"/>
+                                  </p:stCondLst>
+                                  <p:childTnLst>
+                                    <p:animEffect transition="in" filter="fade">
+                                      <p:cBhvr>
+                                        <p:cTn id="13" dur="450"/>
                                         <p:tgtEl>
                                           <p:spTgt spid="4"/>
                                         </p:tgtEl>
@@ -10969,26 +10932,26 @@
                     </p:cTn>
                   </p:par>
                   <p:par>
-                    <p:cTn id="11" fill="hold">
+                    <p:cTn id="14" fill="hold">
                       <p:stCondLst>
                         <p:cond delay="indefinite"/>
                       </p:stCondLst>
                       <p:childTnLst>
                         <p:par>
-                          <p:cTn id="12" fill="hold">
+                          <p:cTn id="15" fill="hold">
                             <p:stCondLst>
                               <p:cond delay="0"/>
                             </p:stCondLst>
                             <p:childTnLst>
                               <p:par>
-                                <p:cTn id="13" presetID="10" presetClass="entr" presetSubtype="0" fill="hold" nodeType="clickEffect">
+                                <p:cTn id="16" presetID="10" presetClass="entr" presetSubtype="0" fill="hold" nodeType="clickEffect">
                                   <p:stCondLst>
                                     <p:cond delay="0"/>
                                   </p:stCondLst>
                                   <p:childTnLst>
                                     <p:animEffect transition="in" filter="fade">
                                       <p:cBhvr>
-                                        <p:cTn id="14" dur="450"/>
+                                        <p:cTn id="17" dur="450"/>
                                         <p:tgtEl>
                                           <p:spTgt spid="5"/>
                                         </p:tgtEl>
@@ -11004,26 +10967,26 @@
                     </p:cTn>
                   </p:par>
                   <p:par>
-                    <p:cTn id="15" fill="hold">
+                    <p:cTn id="18" fill="hold">
                       <p:stCondLst>
                         <p:cond delay="indefinite"/>
                       </p:stCondLst>
                       <p:childTnLst>
                         <p:par>
-                          <p:cTn id="16" fill="hold">
+                          <p:cTn id="19" fill="hold">
                             <p:stCondLst>
                               <p:cond delay="0"/>
                             </p:stCondLst>
                             <p:childTnLst>
                               <p:par>
-                                <p:cTn id="17" presetID="10" presetClass="entr" presetSubtype="0" fill="hold" nodeType="clickEffect">
+                                <p:cTn id="20" presetID="10" presetClass="entr" presetSubtype="0" fill="hold" nodeType="clickEffect">
                                   <p:stCondLst>
                                     <p:cond delay="0"/>
                                   </p:stCondLst>
                                   <p:childTnLst>
                                     <p:animEffect transition="in" filter="fade">
                                       <p:cBhvr>
-                                        <p:cTn id="18" dur="450"/>
+                                        <p:cTn id="21" dur="450"/>
                                         <p:tgtEl>
                                           <p:spTgt spid="6"/>
                                         </p:tgtEl>
@@ -11039,26 +11002,26 @@
                     </p:cTn>
                   </p:par>
                   <p:par>
-                    <p:cTn id="19" fill="hold">
+                    <p:cTn id="22" fill="hold">
                       <p:stCondLst>
                         <p:cond delay="indefinite"/>
                       </p:stCondLst>
                       <p:childTnLst>
                         <p:par>
-                          <p:cTn id="20" fill="hold">
+                          <p:cTn id="23" fill="hold">
                             <p:stCondLst>
                               <p:cond delay="0"/>
                             </p:stCondLst>
                             <p:childTnLst>
                               <p:par>
-                                <p:cTn id="21" presetID="10" presetClass="entr" presetSubtype="0" fill="hold" nodeType="clickEffect">
+                                <p:cTn id="24" presetID="10" presetClass="entr" presetSubtype="0" fill="hold" nodeType="clickEffect">
                                   <p:stCondLst>
                                     <p:cond delay="0"/>
                                   </p:stCondLst>
                                   <p:childTnLst>
                                     <p:animEffect transition="in" filter="fade">
                                       <p:cBhvr>
-                                        <p:cTn id="22" dur="450"/>
+                                        <p:cTn id="25" dur="450"/>
                                         <p:tgtEl>
                                           <p:spTgt spid="7"/>
                                         </p:tgtEl>
@@ -11074,63 +11037,28 @@
                     </p:cTn>
                   </p:par>
                   <p:par>
-                    <p:cTn id="23" fill="hold">
+                    <p:cTn id="26" fill="hold">
                       <p:stCondLst>
                         <p:cond delay="indefinite"/>
                       </p:stCondLst>
                       <p:childTnLst>
                         <p:par>
-                          <p:cTn id="24" fill="hold">
+                          <p:cTn id="27" fill="hold">
                             <p:stCondLst>
                               <p:cond delay="0"/>
                             </p:stCondLst>
                             <p:childTnLst>
                               <p:par>
-                                <p:cTn id="25" presetID="10" presetClass="entr" presetSubtype="0" fill="hold" nodeType="clickEffect">
+                                <p:cTn id="28" presetID="10" presetClass="entr" presetSubtype="0" fill="hold" nodeType="clickEffect">
                                   <p:stCondLst>
                                     <p:cond delay="0"/>
                                   </p:stCondLst>
                                   <p:childTnLst>
                                     <p:animEffect transition="in" filter="fade">
                                       <p:cBhvr>
-                                        <p:cTn id="26" dur="450"/>
+                                        <p:cTn id="29" dur="450"/>
                                         <p:tgtEl>
                                           <p:spTgt spid="8"/>
-                                        </p:tgtEl>
-                                      </p:cBhvr>
-                                    </p:animEffect>
-                                  </p:childTnLst>
-                                </p:cTn>
-                              </p:par>
-                            </p:childTnLst>
-                          </p:cTn>
-                        </p:par>
-                      </p:childTnLst>
-                    </p:cTn>
-                  </p:par>
-                  <p:par>
-                    <p:cTn id="27" fill="hold">
-                      <p:stCondLst>
-                        <p:cond delay="indefinite"/>
-                      </p:stCondLst>
-                      <p:childTnLst>
-                        <p:par>
-                          <p:cTn id="28" fill="hold">
-                            <p:stCondLst>
-                              <p:cond delay="0"/>
-                            </p:stCondLst>
-                            <p:childTnLst>
-                              <p:par>
-                                <p:cTn id="29" presetID="10" presetClass="entr" presetSubtype="0" fill="hold" nodeType="clickEffect">
-                                  <p:stCondLst>
-                                    <p:cond delay="0"/>
-                                  </p:stCondLst>
-                                  <p:childTnLst>
-                                    <p:animEffect transition="in" filter="fade">
-                                      <p:cBhvr>
-                                        <p:cTn id="30" dur="450"/>
-                                        <p:tgtEl>
-                                          <p:spTgt spid="9"/>
                                         </p:tgtEl>
                                       </p:cBhvr>
                                     </p:animEffect>
@@ -11845,30 +11773,21 @@
                             </p:childTnLst>
                           </p:cTn>
                         </p:par>
-                      </p:childTnLst>
-                    </p:cTn>
-                  </p:par>
-                  <p:par>
-                    <p:cTn id="7" fill="hold">
-                      <p:stCondLst>
-                        <p:cond delay="indefinite"/>
-                      </p:stCondLst>
-                      <p:childTnLst>
                         <p:par>
-                          <p:cTn id="8" fill="hold">
+                          <p:cTn id="7" fill="hold">
                             <p:stCondLst>
                               <p:cond delay="0"/>
                             </p:stCondLst>
                             <p:childTnLst>
                               <p:par>
-                                <p:cTn id="9" presetID="10" presetClass="entr" presetSubtype="0" fill="hold" nodeType="clickEffect">
+                                <p:cTn id="8" presetID="10" presetClass="entr" presetSubtype="0" fill="hold" nodeType="afterEffect">
                                   <p:stCondLst>
                                     <p:cond delay="0"/>
                                   </p:stCondLst>
                                   <p:childTnLst>
                                     <p:animEffect transition="in" filter="fade">
                                       <p:cBhvr>
-                                        <p:cTn id="10" dur="450"/>
+                                        <p:cTn id="9" dur="450"/>
                                         <p:tgtEl>
                                           <p:spTgt spid="4"/>
                                         </p:tgtEl>
@@ -11884,26 +11803,26 @@
                     </p:cTn>
                   </p:par>
                   <p:par>
-                    <p:cTn id="11" fill="hold">
+                    <p:cTn id="10" fill="hold">
                       <p:stCondLst>
                         <p:cond delay="indefinite"/>
                       </p:stCondLst>
                       <p:childTnLst>
                         <p:par>
-                          <p:cTn id="12" fill="hold">
+                          <p:cTn id="11" fill="hold">
                             <p:stCondLst>
                               <p:cond delay="0"/>
                             </p:stCondLst>
                             <p:childTnLst>
                               <p:par>
-                                <p:cTn id="13" presetID="10" presetClass="entr" presetSubtype="0" fill="hold" nodeType="clickEffect">
+                                <p:cTn id="12" presetID="10" presetClass="entr" presetSubtype="0" fill="hold" nodeType="clickEffect">
                                   <p:stCondLst>
                                     <p:cond delay="0"/>
                                   </p:stCondLst>
                                   <p:childTnLst>
                                     <p:animEffect transition="in" filter="fade">
                                       <p:cBhvr>
-                                        <p:cTn id="14" dur="450"/>
+                                        <p:cTn id="13" dur="450"/>
                                         <p:tgtEl>
                                           <p:spTgt spid="5"/>
                                         </p:tgtEl>
@@ -11919,26 +11838,26 @@
                     </p:cTn>
                   </p:par>
                   <p:par>
-                    <p:cTn id="15" fill="hold">
+                    <p:cTn id="14" fill="hold">
                       <p:stCondLst>
                         <p:cond delay="indefinite"/>
                       </p:stCondLst>
                       <p:childTnLst>
                         <p:par>
-                          <p:cTn id="16" fill="hold">
+                          <p:cTn id="15" fill="hold">
                             <p:stCondLst>
                               <p:cond delay="0"/>
                             </p:stCondLst>
                             <p:childTnLst>
                               <p:par>
-                                <p:cTn id="17" presetID="10" presetClass="entr" presetSubtype="0" fill="hold" nodeType="clickEffect">
+                                <p:cTn id="16" presetID="10" presetClass="entr" presetSubtype="0" fill="hold" nodeType="clickEffect">
                                   <p:stCondLst>
                                     <p:cond delay="0"/>
                                   </p:stCondLst>
                                   <p:childTnLst>
                                     <p:animEffect transition="in" filter="fade">
                                       <p:cBhvr>
-                                        <p:cTn id="18" dur="450"/>
+                                        <p:cTn id="17" dur="450"/>
                                         <p:tgtEl>
                                           <p:spTgt spid="6"/>
                                         </p:tgtEl>
@@ -11954,26 +11873,26 @@
                     </p:cTn>
                   </p:par>
                   <p:par>
-                    <p:cTn id="19" fill="hold">
+                    <p:cTn id="18" fill="hold">
                       <p:stCondLst>
                         <p:cond delay="indefinite"/>
                       </p:stCondLst>
                       <p:childTnLst>
                         <p:par>
-                          <p:cTn id="20" fill="hold">
+                          <p:cTn id="19" fill="hold">
                             <p:stCondLst>
                               <p:cond delay="0"/>
                             </p:stCondLst>
                             <p:childTnLst>
                               <p:par>
-                                <p:cTn id="21" presetID="10" presetClass="entr" presetSubtype="0" fill="hold" nodeType="clickEffect">
+                                <p:cTn id="20" presetID="10" presetClass="entr" presetSubtype="0" fill="hold" nodeType="clickEffect">
                                   <p:stCondLst>
                                     <p:cond delay="0"/>
                                   </p:stCondLst>
                                   <p:childTnLst>
                                     <p:animEffect transition="in" filter="fade">
                                       <p:cBhvr>
-                                        <p:cTn id="22" dur="450"/>
+                                        <p:cTn id="21" dur="450"/>
                                         <p:tgtEl>
                                           <p:spTgt spid="7"/>
                                         </p:tgtEl>

--- a/ОВЧ-ЭКЗ/Итоговые работы/3952_Теддер_Д_ОхлаждениеКомпьютерныхСистем_Презентация.pptx
+++ b/ОВЧ-ЭКЗ/Итоговые работы/3952_Теддер_Д_ОхлаждениеКомпьютерныхСистем_Презентация.pptx
@@ -3520,7 +3520,7 @@
         </p:nvGraphicFramePr>
         <p:xfrm>
           <a:off x="594360" y="1490472"/>
-          <a:ext cx="6583677" cy="1737360"/>
+          <a:ext cx="6583679" cy="1737360"/>
         </p:xfrm>
         <a:graphic>
           <a:graphicData uri="http://schemas.openxmlformats.org/drawingml/2006/table">
@@ -3529,10 +3529,10 @@
                 <a:tableStyleId>{5C22544A-7EE6-4342-B048-85BDC9FD1C3A}</a:tableStyleId>
               </a:tblPr>
               <a:tblGrid>
-                <a:gridCol w="2106777"/>
-                <a:gridCol w="1492300"/>
-                <a:gridCol w="1492300"/>
-                <a:gridCol w="1492300"/>
+                <a:gridCol w="1843430"/>
+                <a:gridCol w="1580083"/>
+                <a:gridCol w="1580083"/>
+                <a:gridCol w="1580083"/>
               </a:tblGrid>
               <a:tr h="347472">
                 <a:tc>
@@ -3541,7 +3541,7 @@
                     <a:lstStyle/>
                     <a:p>
                       <a:pPr>
-                        <a:defRPr sz="1400" b="1">
+                        <a:defRPr sz="1300" b="1">
                           <a:solidFill>
                             <a:srgbClr val="00E5FF"/>
                           </a:solidFill>
@@ -3565,7 +3565,7 @@
                     <a:lstStyle/>
                     <a:p>
                       <a:pPr>
-                        <a:defRPr sz="1400" b="1">
+                        <a:defRPr sz="1300" b="1">
                           <a:solidFill>
                             <a:srgbClr val="00E5FF"/>
                           </a:solidFill>
@@ -3589,7 +3589,7 @@
                     <a:lstStyle/>
                     <a:p>
                       <a:pPr>
-                        <a:defRPr sz="1400" b="1">
+                        <a:defRPr sz="1300" b="1">
                           <a:solidFill>
                             <a:srgbClr val="00E5FF"/>
                           </a:solidFill>
@@ -3613,7 +3613,7 @@
                     <a:lstStyle/>
                     <a:p>
                       <a:pPr>
-                        <a:defRPr sz="1400" b="1">
+                        <a:defRPr sz="1300" b="1">
                           <a:solidFill>
                             <a:srgbClr val="00E5FF"/>
                           </a:solidFill>
@@ -3639,7 +3639,7 @@
                     <a:lstStyle/>
                     <a:p>
                       <a:pPr>
-                        <a:defRPr sz="1200">
+                        <a:defRPr sz="1150">
                           <a:solidFill>
                             <a:srgbClr val="D7E9F5"/>
                           </a:solidFill>
@@ -3663,7 +3663,7 @@
                     <a:lstStyle/>
                     <a:p>
                       <a:pPr>
-                        <a:defRPr sz="1200">
+                        <a:defRPr sz="1150">
                           <a:solidFill>
                             <a:srgbClr val="D7E9F5"/>
                           </a:solidFill>
@@ -3687,7 +3687,7 @@
                     <a:lstStyle/>
                     <a:p>
                       <a:pPr>
-                        <a:defRPr sz="1200">
+                        <a:defRPr sz="1150">
                           <a:solidFill>
                             <a:srgbClr val="D7E9F5"/>
                           </a:solidFill>
@@ -3711,7 +3711,7 @@
                     <a:lstStyle/>
                     <a:p>
                       <a:pPr>
-                        <a:defRPr sz="1200">
+                        <a:defRPr sz="1150">
                           <a:solidFill>
                             <a:srgbClr val="D7E9F5"/>
                           </a:solidFill>
@@ -3737,7 +3737,7 @@
                     <a:lstStyle/>
                     <a:p>
                       <a:pPr>
-                        <a:defRPr sz="1200">
+                        <a:defRPr sz="1150">
                           <a:solidFill>
                             <a:srgbClr val="D7E9F5"/>
                           </a:solidFill>
@@ -3761,7 +3761,7 @@
                     <a:lstStyle/>
                     <a:p>
                       <a:pPr>
-                        <a:defRPr sz="1200">
+                        <a:defRPr sz="1150">
                           <a:solidFill>
                             <a:srgbClr val="D7E9F5"/>
                           </a:solidFill>
@@ -3785,7 +3785,7 @@
                     <a:lstStyle/>
                     <a:p>
                       <a:pPr>
-                        <a:defRPr sz="1200">
+                        <a:defRPr sz="1150">
                           <a:solidFill>
                             <a:srgbClr val="D7E9F5"/>
                           </a:solidFill>
@@ -3809,7 +3809,7 @@
                     <a:lstStyle/>
                     <a:p>
                       <a:pPr>
-                        <a:defRPr sz="1200">
+                        <a:defRPr sz="1150">
                           <a:solidFill>
                             <a:srgbClr val="D7E9F5"/>
                           </a:solidFill>
@@ -3835,7 +3835,7 @@
                     <a:lstStyle/>
                     <a:p>
                       <a:pPr>
-                        <a:defRPr sz="1200">
+                        <a:defRPr sz="1150">
                           <a:solidFill>
                             <a:srgbClr val="D7E9F5"/>
                           </a:solidFill>
@@ -3859,7 +3859,7 @@
                     <a:lstStyle/>
                     <a:p>
                       <a:pPr>
-                        <a:defRPr sz="1200">
+                        <a:defRPr sz="1150">
                           <a:solidFill>
                             <a:srgbClr val="D7E9F5"/>
                           </a:solidFill>
@@ -3883,7 +3883,7 @@
                     <a:lstStyle/>
                     <a:p>
                       <a:pPr>
-                        <a:defRPr sz="1200">
+                        <a:defRPr sz="1150">
                           <a:solidFill>
                             <a:srgbClr val="D7E9F5"/>
                           </a:solidFill>
@@ -3907,7 +3907,7 @@
                     <a:lstStyle/>
                     <a:p>
                       <a:pPr>
-                        <a:defRPr sz="1200">
+                        <a:defRPr sz="1150">
                           <a:solidFill>
                             <a:srgbClr val="D7E9F5"/>
                           </a:solidFill>
@@ -3933,7 +3933,7 @@
                     <a:lstStyle/>
                     <a:p>
                       <a:pPr>
-                        <a:defRPr sz="1200">
+                        <a:defRPr sz="1150">
                           <a:solidFill>
                             <a:srgbClr val="D7E9F5"/>
                           </a:solidFill>
@@ -3957,7 +3957,7 @@
                     <a:lstStyle/>
                     <a:p>
                       <a:pPr>
-                        <a:defRPr sz="1200">
+                        <a:defRPr sz="1150">
                           <a:solidFill>
                             <a:srgbClr val="D7E9F5"/>
                           </a:solidFill>
@@ -3981,7 +3981,7 @@
                     <a:lstStyle/>
                     <a:p>
                       <a:pPr>
-                        <a:defRPr sz="1200">
+                        <a:defRPr sz="1150">
                           <a:solidFill>
                             <a:srgbClr val="D7E9F5"/>
                           </a:solidFill>
@@ -4005,7 +4005,7 @@
                     <a:lstStyle/>
                     <a:p>
                       <a:pPr>
-                        <a:defRPr sz="1200">
+                        <a:defRPr sz="1150">
                           <a:solidFill>
                             <a:srgbClr val="D7E9F5"/>
                           </a:solidFill>
@@ -5309,7 +5309,7 @@
         </p:nvGraphicFramePr>
         <p:xfrm>
           <a:off x="594360" y="1490472"/>
-          <a:ext cx="6583677" cy="2084832"/>
+          <a:ext cx="6583679" cy="2084832"/>
         </p:xfrm>
         <a:graphic>
           <a:graphicData uri="http://schemas.openxmlformats.org/drawingml/2006/table">
@@ -5318,10 +5318,10 @@
                 <a:tableStyleId>{5C22544A-7EE6-4342-B048-85BDC9FD1C3A}</a:tableStyleId>
               </a:tblPr>
               <a:tblGrid>
-                <a:gridCol w="2106777"/>
-                <a:gridCol w="1492300"/>
-                <a:gridCol w="1492300"/>
-                <a:gridCol w="1492300"/>
+                <a:gridCol w="1843430"/>
+                <a:gridCol w="1580083"/>
+                <a:gridCol w="1580083"/>
+                <a:gridCol w="1580083"/>
               </a:tblGrid>
               <a:tr h="347472">
                 <a:tc>
@@ -5330,7 +5330,7 @@
                     <a:lstStyle/>
                     <a:p>
                       <a:pPr>
-                        <a:defRPr sz="1400" b="1">
+                        <a:defRPr sz="1300" b="1">
                           <a:solidFill>
                             <a:srgbClr val="00E5FF"/>
                           </a:solidFill>
@@ -5354,7 +5354,7 @@
                     <a:lstStyle/>
                     <a:p>
                       <a:pPr>
-                        <a:defRPr sz="1400" b="1">
+                        <a:defRPr sz="1300" b="1">
                           <a:solidFill>
                             <a:srgbClr val="00E5FF"/>
                           </a:solidFill>
@@ -5378,7 +5378,7 @@
                     <a:lstStyle/>
                     <a:p>
                       <a:pPr>
-                        <a:defRPr sz="1400" b="1">
+                        <a:defRPr sz="1300" b="1">
                           <a:solidFill>
                             <a:srgbClr val="00E5FF"/>
                           </a:solidFill>
@@ -5402,7 +5402,7 @@
                     <a:lstStyle/>
                     <a:p>
                       <a:pPr>
-                        <a:defRPr sz="1400" b="1">
+                        <a:defRPr sz="1300" b="1">
                           <a:solidFill>
                             <a:srgbClr val="00E5FF"/>
                           </a:solidFill>
@@ -5428,7 +5428,7 @@
                     <a:lstStyle/>
                     <a:p>
                       <a:pPr>
-                        <a:defRPr sz="1200">
+                        <a:defRPr sz="1150">
                           <a:solidFill>
                             <a:srgbClr val="D7E9F5"/>
                           </a:solidFill>
@@ -5452,7 +5452,7 @@
                     <a:lstStyle/>
                     <a:p>
                       <a:pPr>
-                        <a:defRPr sz="1200">
+                        <a:defRPr sz="1150">
                           <a:solidFill>
                             <a:srgbClr val="D7E9F5"/>
                           </a:solidFill>
@@ -5476,7 +5476,7 @@
                     <a:lstStyle/>
                     <a:p>
                       <a:pPr>
-                        <a:defRPr sz="1200">
+                        <a:defRPr sz="1150">
                           <a:solidFill>
                             <a:srgbClr val="D7E9F5"/>
                           </a:solidFill>
@@ -5500,7 +5500,7 @@
                     <a:lstStyle/>
                     <a:p>
                       <a:pPr>
-                        <a:defRPr sz="1200">
+                        <a:defRPr sz="1150">
                           <a:solidFill>
                             <a:srgbClr val="D7E9F5"/>
                           </a:solidFill>
@@ -5526,7 +5526,7 @@
                     <a:lstStyle/>
                     <a:p>
                       <a:pPr>
-                        <a:defRPr sz="1200">
+                        <a:defRPr sz="1150">
                           <a:solidFill>
                             <a:srgbClr val="D7E9F5"/>
                           </a:solidFill>
@@ -5550,7 +5550,7 @@
                     <a:lstStyle/>
                     <a:p>
                       <a:pPr>
-                        <a:defRPr sz="1200">
+                        <a:defRPr sz="1150">
                           <a:solidFill>
                             <a:srgbClr val="D7E9F5"/>
                           </a:solidFill>
@@ -5574,7 +5574,7 @@
                     <a:lstStyle/>
                     <a:p>
                       <a:pPr>
-                        <a:defRPr sz="1200">
+                        <a:defRPr sz="1150">
                           <a:solidFill>
                             <a:srgbClr val="D7E9F5"/>
                           </a:solidFill>
@@ -5598,7 +5598,7 @@
                     <a:lstStyle/>
                     <a:p>
                       <a:pPr>
-                        <a:defRPr sz="1200">
+                        <a:defRPr sz="1150">
                           <a:solidFill>
                             <a:srgbClr val="D7E9F5"/>
                           </a:solidFill>
@@ -5624,7 +5624,7 @@
                     <a:lstStyle/>
                     <a:p>
                       <a:pPr>
-                        <a:defRPr sz="1200">
+                        <a:defRPr sz="1150">
                           <a:solidFill>
                             <a:srgbClr val="D7E9F5"/>
                           </a:solidFill>
@@ -5648,7 +5648,7 @@
                     <a:lstStyle/>
                     <a:p>
                       <a:pPr>
-                        <a:defRPr sz="1200">
+                        <a:defRPr sz="1150">
                           <a:solidFill>
                             <a:srgbClr val="D7E9F5"/>
                           </a:solidFill>
@@ -5672,7 +5672,7 @@
                     <a:lstStyle/>
                     <a:p>
                       <a:pPr>
-                        <a:defRPr sz="1200">
+                        <a:defRPr sz="1150">
                           <a:solidFill>
                             <a:srgbClr val="D7E9F5"/>
                           </a:solidFill>
@@ -5696,7 +5696,7 @@
                     <a:lstStyle/>
                     <a:p>
                       <a:pPr>
-                        <a:defRPr sz="1200">
+                        <a:defRPr sz="1150">
                           <a:solidFill>
                             <a:srgbClr val="D7E9F5"/>
                           </a:solidFill>
@@ -5722,7 +5722,7 @@
                     <a:lstStyle/>
                     <a:p>
                       <a:pPr>
-                        <a:defRPr sz="1200">
+                        <a:defRPr sz="1150">
                           <a:solidFill>
                             <a:srgbClr val="D7E9F5"/>
                           </a:solidFill>
@@ -5746,7 +5746,7 @@
                     <a:lstStyle/>
                     <a:p>
                       <a:pPr>
-                        <a:defRPr sz="1200">
+                        <a:defRPr sz="1150">
                           <a:solidFill>
                             <a:srgbClr val="D7E9F5"/>
                           </a:solidFill>
@@ -5770,7 +5770,7 @@
                     <a:lstStyle/>
                     <a:p>
                       <a:pPr>
-                        <a:defRPr sz="1200">
+                        <a:defRPr sz="1150">
                           <a:solidFill>
                             <a:srgbClr val="D7E9F5"/>
                           </a:solidFill>
@@ -5794,7 +5794,7 @@
                     <a:lstStyle/>
                     <a:p>
                       <a:pPr>
-                        <a:defRPr sz="1200">
+                        <a:defRPr sz="1150">
                           <a:solidFill>
                             <a:srgbClr val="D7E9F5"/>
                           </a:solidFill>
@@ -5820,7 +5820,7 @@
                     <a:lstStyle/>
                     <a:p>
                       <a:pPr>
-                        <a:defRPr sz="1200">
+                        <a:defRPr sz="1150">
                           <a:solidFill>
                             <a:srgbClr val="D7E9F5"/>
                           </a:solidFill>
@@ -5844,7 +5844,7 @@
                     <a:lstStyle/>
                     <a:p>
                       <a:pPr>
-                        <a:defRPr sz="1200">
+                        <a:defRPr sz="1150">
                           <a:solidFill>
                             <a:srgbClr val="D7E9F5"/>
                           </a:solidFill>
@@ -5868,7 +5868,7 @@
                     <a:lstStyle/>
                     <a:p>
                       <a:pPr>
-                        <a:defRPr sz="1200">
+                        <a:defRPr sz="1150">
                           <a:solidFill>
                             <a:srgbClr val="D7E9F5"/>
                           </a:solidFill>
@@ -5892,7 +5892,7 @@
                     <a:lstStyle/>
                     <a:p>
                       <a:pPr>
-                        <a:defRPr sz="1200">
+                        <a:defRPr sz="1150">
                           <a:solidFill>
                             <a:srgbClr val="D7E9F5"/>
                           </a:solidFill>
@@ -6316,7 +6316,7 @@
         </p:nvGraphicFramePr>
         <p:xfrm>
           <a:off x="594360" y="1490472"/>
-          <a:ext cx="6583677" cy="1737360"/>
+          <a:ext cx="6583679" cy="1737360"/>
         </p:xfrm>
         <a:graphic>
           <a:graphicData uri="http://schemas.openxmlformats.org/drawingml/2006/table">
@@ -6325,10 +6325,10 @@
                 <a:tableStyleId>{5C22544A-7EE6-4342-B048-85BDC9FD1C3A}</a:tableStyleId>
               </a:tblPr>
               <a:tblGrid>
-                <a:gridCol w="2106777"/>
-                <a:gridCol w="1492300"/>
-                <a:gridCol w="1492300"/>
-                <a:gridCol w="1492300"/>
+                <a:gridCol w="1843430"/>
+                <a:gridCol w="1580083"/>
+                <a:gridCol w="1580083"/>
+                <a:gridCol w="1580083"/>
               </a:tblGrid>
               <a:tr h="347472">
                 <a:tc>
@@ -6337,7 +6337,7 @@
                     <a:lstStyle/>
                     <a:p>
                       <a:pPr>
-                        <a:defRPr sz="1400" b="1">
+                        <a:defRPr sz="1300" b="1">
                           <a:solidFill>
                             <a:srgbClr val="00E5FF"/>
                           </a:solidFill>
@@ -6361,7 +6361,7 @@
                     <a:lstStyle/>
                     <a:p>
                       <a:pPr>
-                        <a:defRPr sz="1400" b="1">
+                        <a:defRPr sz="1300" b="1">
                           <a:solidFill>
                             <a:srgbClr val="00E5FF"/>
                           </a:solidFill>
@@ -6385,7 +6385,7 @@
                     <a:lstStyle/>
                     <a:p>
                       <a:pPr>
-                        <a:defRPr sz="1400" b="1">
+                        <a:defRPr sz="1300" b="1">
                           <a:solidFill>
                             <a:srgbClr val="00E5FF"/>
                           </a:solidFill>
@@ -6409,7 +6409,7 @@
                     <a:lstStyle/>
                     <a:p>
                       <a:pPr>
-                        <a:defRPr sz="1400" b="1">
+                        <a:defRPr sz="1300" b="1">
                           <a:solidFill>
                             <a:srgbClr val="00E5FF"/>
                           </a:solidFill>
@@ -6435,7 +6435,7 @@
                     <a:lstStyle/>
                     <a:p>
                       <a:pPr>
-                        <a:defRPr sz="1200">
+                        <a:defRPr sz="1150">
                           <a:solidFill>
                             <a:srgbClr val="D7E9F5"/>
                           </a:solidFill>
@@ -6459,7 +6459,7 @@
                     <a:lstStyle/>
                     <a:p>
                       <a:pPr>
-                        <a:defRPr sz="1200">
+                        <a:defRPr sz="1150">
                           <a:solidFill>
                             <a:srgbClr val="D7E9F5"/>
                           </a:solidFill>
@@ -6483,7 +6483,7 @@
                     <a:lstStyle/>
                     <a:p>
                       <a:pPr>
-                        <a:defRPr sz="1200">
+                        <a:defRPr sz="1150">
                           <a:solidFill>
                             <a:srgbClr val="D7E9F5"/>
                           </a:solidFill>
@@ -6507,7 +6507,7 @@
                     <a:lstStyle/>
                     <a:p>
                       <a:pPr>
-                        <a:defRPr sz="1200">
+                        <a:defRPr sz="1150">
                           <a:solidFill>
                             <a:srgbClr val="D7E9F5"/>
                           </a:solidFill>
@@ -6533,7 +6533,7 @@
                     <a:lstStyle/>
                     <a:p>
                       <a:pPr>
-                        <a:defRPr sz="1200">
+                        <a:defRPr sz="1150">
                           <a:solidFill>
                             <a:srgbClr val="D7E9F5"/>
                           </a:solidFill>
@@ -6557,7 +6557,7 @@
                     <a:lstStyle/>
                     <a:p>
                       <a:pPr>
-                        <a:defRPr sz="1200">
+                        <a:defRPr sz="1150">
                           <a:solidFill>
                             <a:srgbClr val="D7E9F5"/>
                           </a:solidFill>
@@ -6581,7 +6581,7 @@
                     <a:lstStyle/>
                     <a:p>
                       <a:pPr>
-                        <a:defRPr sz="1200">
+                        <a:defRPr sz="1150">
                           <a:solidFill>
                             <a:srgbClr val="D7E9F5"/>
                           </a:solidFill>
@@ -6605,7 +6605,7 @@
                     <a:lstStyle/>
                     <a:p>
                       <a:pPr>
-                        <a:defRPr sz="1200">
+                        <a:defRPr sz="1150">
                           <a:solidFill>
                             <a:srgbClr val="D7E9F5"/>
                           </a:solidFill>
@@ -6631,7 +6631,7 @@
                     <a:lstStyle/>
                     <a:p>
                       <a:pPr>
-                        <a:defRPr sz="1200">
+                        <a:defRPr sz="1150">
                           <a:solidFill>
                             <a:srgbClr val="D7E9F5"/>
                           </a:solidFill>
@@ -6655,7 +6655,7 @@
                     <a:lstStyle/>
                     <a:p>
                       <a:pPr>
-                        <a:defRPr sz="1200">
+                        <a:defRPr sz="1150">
                           <a:solidFill>
                             <a:srgbClr val="D7E9F5"/>
                           </a:solidFill>
@@ -6679,7 +6679,7 @@
                     <a:lstStyle/>
                     <a:p>
                       <a:pPr>
-                        <a:defRPr sz="1200">
+                        <a:defRPr sz="1150">
                           <a:solidFill>
                             <a:srgbClr val="D7E9F5"/>
                           </a:solidFill>
@@ -6703,7 +6703,7 @@
                     <a:lstStyle/>
                     <a:p>
                       <a:pPr>
-                        <a:defRPr sz="1200">
+                        <a:defRPr sz="1150">
                           <a:solidFill>
                             <a:srgbClr val="D7E9F5"/>
                           </a:solidFill>
@@ -6729,7 +6729,7 @@
                     <a:lstStyle/>
                     <a:p>
                       <a:pPr>
-                        <a:defRPr sz="1200">
+                        <a:defRPr sz="1150">
                           <a:solidFill>
                             <a:srgbClr val="D7E9F5"/>
                           </a:solidFill>
@@ -6753,7 +6753,7 @@
                     <a:lstStyle/>
                     <a:p>
                       <a:pPr>
-                        <a:defRPr sz="1200">
+                        <a:defRPr sz="1150">
                           <a:solidFill>
                             <a:srgbClr val="D7E9F5"/>
                           </a:solidFill>
@@ -6777,7 +6777,7 @@
                     <a:lstStyle/>
                     <a:p>
                       <a:pPr>
-                        <a:defRPr sz="1200">
+                        <a:defRPr sz="1150">
                           <a:solidFill>
                             <a:srgbClr val="D7E9F5"/>
                           </a:solidFill>
@@ -6801,7 +6801,7 @@
                     <a:lstStyle/>
                     <a:p>
                       <a:pPr>
-                        <a:defRPr sz="1200">
+                        <a:defRPr sz="1150">
                           <a:solidFill>
                             <a:srgbClr val="D7E9F5"/>
                           </a:solidFill>
@@ -11724,7 +11724,7 @@
                 </a:solidFill>
                 <a:latin typeface="Consolas"/>
               </a:rPr>
-              <a:t>Сравнительный анализ технологий охлаждения</a:t>
+              <a:t>Сравнительный анализ: какой способ охлаждения лучше?</a:t>
             </a:r>
           </a:p>
         </p:txBody>
@@ -11739,7 +11739,7 @@
         </p:nvGraphicFramePr>
         <p:xfrm>
           <a:off x="594360" y="1490472"/>
-          <a:ext cx="6583678" cy="2432304"/>
+          <a:ext cx="6675116" cy="2432304"/>
         </p:xfrm>
         <a:graphic>
           <a:graphicData uri="http://schemas.openxmlformats.org/drawingml/2006/table">
@@ -11748,11 +11748,11 @@
                 <a:tableStyleId>{5C22544A-7EE6-4342-B048-85BDC9FD1C3A}</a:tableStyleId>
               </a:tblPr>
               <a:tblGrid>
-                <a:gridCol w="1843430"/>
-                <a:gridCol w="1185062"/>
-                <a:gridCol w="1185062"/>
-                <a:gridCol w="1185062"/>
-                <a:gridCol w="1185062"/>
+                <a:gridCol w="2002536"/>
+                <a:gridCol w="1168145"/>
+                <a:gridCol w="1168145"/>
+                <a:gridCol w="1168145"/>
+                <a:gridCol w="1168145"/>
               </a:tblGrid>
               <a:tr h="347472">
                 <a:tc>
@@ -11761,7 +11761,7 @@
                     <a:lstStyle/>
                     <a:p>
                       <a:pPr>
-                        <a:defRPr sz="1400" b="1">
+                        <a:defRPr sz="1300" b="1">
                           <a:solidFill>
                             <a:srgbClr val="00E5FF"/>
                           </a:solidFill>
@@ -11785,7 +11785,7 @@
                     <a:lstStyle/>
                     <a:p>
                       <a:pPr>
-                        <a:defRPr sz="1400" b="1">
+                        <a:defRPr sz="1300" b="1">
                           <a:solidFill>
                             <a:srgbClr val="00E5FF"/>
                           </a:solidFill>
@@ -11793,7 +11793,7 @@
                         </a:defRPr>
                       </a:pPr>
                       <a:r>
-                        <a:t>Предел отвода</a:t>
+                        <a:t>Предел TDP</a:t>
                       </a:r>
                     </a:p>
                   </a:txBody>
@@ -11809,7 +11809,7 @@
                     <a:lstStyle/>
                     <a:p>
                       <a:pPr>
-                        <a:defRPr sz="1400" b="1">
+                        <a:defRPr sz="1300" b="1">
                           <a:solidFill>
                             <a:srgbClr val="00E5FF"/>
                           </a:solidFill>
@@ -11833,7 +11833,7 @@
                     <a:lstStyle/>
                     <a:p>
                       <a:pPr>
-                        <a:defRPr sz="1400" b="1">
+                        <a:defRPr sz="1300" b="1">
                           <a:solidFill>
                             <a:srgbClr val="00E5FF"/>
                           </a:solidFill>
@@ -11857,7 +11857,7 @@
                     <a:lstStyle/>
                     <a:p>
                       <a:pPr>
-                        <a:defRPr sz="1400" b="1">
+                        <a:defRPr sz="1300" b="1">
                           <a:solidFill>
                             <a:srgbClr val="00E5FF"/>
                           </a:solidFill>
@@ -11865,7 +11865,7 @@
                         </a:defRPr>
                       </a:pPr>
                       <a:r>
-                        <a:t>Риск аварии</a:t>
+                        <a:t>Надёжность</a:t>
                       </a:r>
                     </a:p>
                   </a:txBody>
@@ -11883,7 +11883,7 @@
                     <a:lstStyle/>
                     <a:p>
                       <a:pPr>
-                        <a:defRPr sz="1200">
+                        <a:defRPr sz="1150">
                           <a:solidFill>
                             <a:srgbClr val="D7E9F5"/>
                           </a:solidFill>
@@ -11907,7 +11907,7 @@
                     <a:lstStyle/>
                     <a:p>
                       <a:pPr>
-                        <a:defRPr sz="1200">
+                        <a:defRPr sz="1150">
                           <a:solidFill>
                             <a:srgbClr val="D7E9F5"/>
                           </a:solidFill>
@@ -11931,7 +11931,7 @@
                     <a:lstStyle/>
                     <a:p>
                       <a:pPr>
-                        <a:defRPr sz="1200">
+                        <a:defRPr sz="1150">
                           <a:solidFill>
                             <a:srgbClr val="D7E9F5"/>
                           </a:solidFill>
@@ -11955,7 +11955,7 @@
                     <a:lstStyle/>
                     <a:p>
                       <a:pPr>
-                        <a:defRPr sz="1200">
+                        <a:defRPr sz="1150">
                           <a:solidFill>
                             <a:srgbClr val="D7E9F5"/>
                           </a:solidFill>
@@ -11963,7 +11963,7 @@
                         </a:defRPr>
                       </a:pPr>
                       <a:r>
-                        <a:t>низкая</a:t>
+                        <a:t>минимальная</a:t>
                       </a:r>
                     </a:p>
                   </a:txBody>
@@ -11979,7 +11979,7 @@
                     <a:lstStyle/>
                     <a:p>
                       <a:pPr>
-                        <a:defRPr sz="1200">
+                        <a:defRPr sz="1150">
                           <a:solidFill>
                             <a:srgbClr val="D7E9F5"/>
                           </a:solidFill>
@@ -11987,7 +11987,7 @@
                         </a:defRPr>
                       </a:pPr>
                       <a:r>
-                        <a:t>минимальный</a:t>
+                        <a:t>максимальная</a:t>
                       </a:r>
                     </a:p>
                   </a:txBody>
@@ -12005,7 +12005,7 @@
                     <a:lstStyle/>
                     <a:p>
                       <a:pPr>
-                        <a:defRPr sz="1200">
+                        <a:defRPr sz="1150">
                           <a:solidFill>
                             <a:srgbClr val="D7E9F5"/>
                           </a:solidFill>
@@ -12029,7 +12029,7 @@
                     <a:lstStyle/>
                     <a:p>
                       <a:pPr>
-                        <a:defRPr sz="1200">
+                        <a:defRPr sz="1150">
                           <a:solidFill>
                             <a:srgbClr val="D7E9F5"/>
                           </a:solidFill>
@@ -12053,7 +12053,7 @@
                     <a:lstStyle/>
                     <a:p>
                       <a:pPr>
-                        <a:defRPr sz="1200">
+                        <a:defRPr sz="1150">
                           <a:solidFill>
                             <a:srgbClr val="D7E9F5"/>
                           </a:solidFill>
@@ -12061,7 +12061,7 @@
                         </a:defRPr>
                       </a:pPr>
                       <a:r>
-                        <a:t>низкий-средний</a:t>
+                        <a:t>низкий</a:t>
                       </a:r>
                     </a:p>
                   </a:txBody>
@@ -12077,7 +12077,7 @@
                     <a:lstStyle/>
                     <a:p>
                       <a:pPr>
-                        <a:defRPr sz="1200">
+                        <a:defRPr sz="1150">
                           <a:solidFill>
                             <a:srgbClr val="D7E9F5"/>
                           </a:solidFill>
@@ -12101,7 +12101,7 @@
                     <a:lstStyle/>
                     <a:p>
                       <a:pPr>
-                        <a:defRPr sz="1200">
+                        <a:defRPr sz="1150">
                           <a:solidFill>
                             <a:srgbClr val="D7E9F5"/>
                           </a:solidFill>
@@ -12109,7 +12109,7 @@
                         </a:defRPr>
                       </a:pPr>
                       <a:r>
-                        <a:t>низкий</a:t>
+                        <a:t>высокая (3–5 лет)</a:t>
                       </a:r>
                     </a:p>
                   </a:txBody>
@@ -12127,7 +12127,7 @@
                     <a:lstStyle/>
                     <a:p>
                       <a:pPr>
-                        <a:defRPr sz="1200">
+                        <a:defRPr sz="1150">
                           <a:solidFill>
                             <a:srgbClr val="D7E9F5"/>
                           </a:solidFill>
@@ -12151,7 +12151,7 @@
                     <a:lstStyle/>
                     <a:p>
                       <a:pPr>
-                        <a:defRPr sz="1200">
+                        <a:defRPr sz="1150">
                           <a:solidFill>
                             <a:srgbClr val="D7E9F5"/>
                           </a:solidFill>
@@ -12175,7 +12175,7 @@
                     <a:lstStyle/>
                     <a:p>
                       <a:pPr>
-                        <a:defRPr sz="1200">
+                        <a:defRPr sz="1150">
                           <a:solidFill>
                             <a:srgbClr val="D7E9F5"/>
                           </a:solidFill>
@@ -12183,7 +12183,7 @@
                         </a:defRPr>
                       </a:pPr>
                       <a:r>
-                        <a:t>низкий</a:t>
+                        <a:t>минимальный</a:t>
                       </a:r>
                     </a:p>
                   </a:txBody>
@@ -12199,7 +12199,7 @@
                     <a:lstStyle/>
                     <a:p>
                       <a:pPr>
-                        <a:defRPr sz="1200">
+                        <a:defRPr sz="1150">
                           <a:solidFill>
                             <a:srgbClr val="D7E9F5"/>
                           </a:solidFill>
@@ -12207,7 +12207,7 @@
                         </a:defRPr>
                       </a:pPr>
                       <a:r>
-                        <a:t>высокая</a:t>
+                        <a:t>очень высокая</a:t>
                       </a:r>
                     </a:p>
                   </a:txBody>
@@ -12223,7 +12223,7 @@
                     <a:lstStyle/>
                     <a:p>
                       <a:pPr>
-                        <a:defRPr sz="1200">
+                        <a:defRPr sz="1150">
                           <a:solidFill>
                             <a:srgbClr val="D7E9F5"/>
                           </a:solidFill>
@@ -12231,7 +12231,7 @@
                         </a:defRPr>
                       </a:pPr>
                       <a:r>
-                        <a:t>средний (протечка)</a:t>
+                        <a:t>требует ТО</a:t>
                       </a:r>
                     </a:p>
                   </a:txBody>
@@ -12249,7 +12249,7 @@
                     <a:lstStyle/>
                     <a:p>
                       <a:pPr>
-                        <a:defRPr sz="1200">
+                        <a:defRPr sz="1150">
                           <a:solidFill>
                             <a:srgbClr val="D7E9F5"/>
                           </a:solidFill>
@@ -12273,7 +12273,7 @@
                     <a:lstStyle/>
                     <a:p>
                       <a:pPr>
-                        <a:defRPr sz="1200">
+                        <a:defRPr sz="1150">
                           <a:solidFill>
                             <a:srgbClr val="D7E9F5"/>
                           </a:solidFill>
@@ -12297,7 +12297,7 @@
                     <a:lstStyle/>
                     <a:p>
                       <a:pPr>
-                        <a:defRPr sz="1200">
+                        <a:defRPr sz="1150">
                           <a:solidFill>
                             <a:srgbClr val="D7E9F5"/>
                           </a:solidFill>
@@ -12321,7 +12321,7 @@
                     <a:lstStyle/>
                     <a:p>
                       <a:pPr>
-                        <a:defRPr sz="1200">
+                        <a:defRPr sz="1150">
                           <a:solidFill>
                             <a:srgbClr val="D7E9F5"/>
                           </a:solidFill>
@@ -12345,7 +12345,7 @@
                     <a:lstStyle/>
                     <a:p>
                       <a:pPr>
-                        <a:defRPr sz="1200">
+                        <a:defRPr sz="1150">
                           <a:solidFill>
                             <a:srgbClr val="D7E9F5"/>
                           </a:solidFill>
@@ -12353,7 +12353,7 @@
                         </a:defRPr>
                       </a:pPr>
                       <a:r>
-                        <a:t>конденсат на плате</a:t>
+                        <a:t>риск конденсата</a:t>
                       </a:r>
                     </a:p>
                   </a:txBody>
@@ -12371,7 +12371,7 @@
                     <a:lstStyle/>
                     <a:p>
                       <a:pPr>
-                        <a:defRPr sz="1200">
+                        <a:defRPr sz="1150">
                           <a:solidFill>
                             <a:srgbClr val="D7E9F5"/>
                           </a:solidFill>
@@ -12395,7 +12395,7 @@
                     <a:lstStyle/>
                     <a:p>
                       <a:pPr>
-                        <a:defRPr sz="1200">
+                        <a:defRPr sz="1150">
                           <a:solidFill>
                             <a:srgbClr val="D7E9F5"/>
                           </a:solidFill>
@@ -12403,7 +12403,7 @@
                         </a:defRPr>
                       </a:pPr>
                       <a:r>
-                        <a:t>без лимита узла</a:t>
+                        <a:t>не ограничен</a:t>
                       </a:r>
                     </a:p>
                   </a:txBody>
@@ -12419,7 +12419,7 @@
                     <a:lstStyle/>
                     <a:p>
                       <a:pPr>
-                        <a:defRPr sz="1200">
+                        <a:defRPr sz="1150">
                           <a:solidFill>
                             <a:srgbClr val="D7E9F5"/>
                           </a:solidFill>
@@ -12443,7 +12443,7 @@
                     <a:lstStyle/>
                     <a:p>
                       <a:pPr>
-                        <a:defRPr sz="1200">
+                        <a:defRPr sz="1150">
                           <a:solidFill>
                             <a:srgbClr val="D7E9F5"/>
                           </a:solidFill>
@@ -12467,7 +12467,7 @@
                     <a:lstStyle/>
                     <a:p>
                       <a:pPr>
-                        <a:defRPr sz="1200">
+                        <a:defRPr sz="1150">
                           <a:solidFill>
                             <a:srgbClr val="D7E9F5"/>
                           </a:solidFill>
@@ -12475,7 +12475,7 @@
                         </a:defRPr>
                       </a:pPr>
                       <a:r>
-                        <a:t>минимальный</a:t>
+                        <a:t>высокая (ЦОД)</a:t>
                       </a:r>
                     </a:p>
                   </a:txBody>
@@ -12493,7 +12493,7 @@
                     <a:lstStyle/>
                     <a:p>
                       <a:pPr>
-                        <a:defRPr sz="1200">
+                        <a:defRPr sz="1150">
                           <a:solidFill>
                             <a:srgbClr val="D7E9F5"/>
                           </a:solidFill>
@@ -12517,7 +12517,7 @@
                     <a:lstStyle/>
                     <a:p>
                       <a:pPr>
-                        <a:defRPr sz="1200">
+                        <a:defRPr sz="1150">
                           <a:solidFill>
                             <a:srgbClr val="D7E9F5"/>
                           </a:solidFill>
@@ -12541,7 +12541,7 @@
                     <a:lstStyle/>
                     <a:p>
                       <a:pPr>
-                        <a:defRPr sz="1200">
+                        <a:defRPr sz="1150">
                           <a:solidFill>
                             <a:srgbClr val="D7E9F5"/>
                           </a:solidFill>
@@ -12565,7 +12565,7 @@
                     <a:lstStyle/>
                     <a:p>
                       <a:pPr>
-                        <a:defRPr sz="1200">
+                        <a:defRPr sz="1150">
                           <a:solidFill>
                             <a:srgbClr val="D7E9F5"/>
                           </a:solidFill>
@@ -12589,7 +12589,7 @@
                     <a:lstStyle/>
                     <a:p>
                       <a:pPr>
-                        <a:defRPr sz="1200">
+                        <a:defRPr sz="1150">
                           <a:solidFill>
                             <a:srgbClr val="D7E9F5"/>
                           </a:solidFill>
@@ -12597,7 +12597,7 @@
                         </a:defRPr>
                       </a:pPr>
                       <a:r>
-                        <a:t>нет</a:t>
+                        <a:t>абсолютная</a:t>
                       </a:r>
                     </a:p>
                   </a:txBody>
@@ -12620,8 +12620,8 @@
         </p:nvSpPr>
         <p:spPr>
           <a:xfrm>
-            <a:off x="658368" y="4279392"/>
-            <a:ext cx="6629400" cy="530352"/>
+            <a:off x="7498079" y="1490472"/>
+            <a:ext cx="4114800" cy="411480"/>
           </a:xfrm>
           <a:prstGeom prst="rect">
             <a:avLst/>
@@ -12640,22 +12640,257 @@
               </a:lnSpc>
             </a:pPr>
             <a:r>
-              <a:rPr sz="1350" b="1">
+              <a:rPr sz="1500" b="1">
                 <a:solidFill>
                   <a:srgbClr val="00E5FF"/>
                 </a:solidFill>
                 <a:latin typeface="Consolas"/>
               </a:rPr>
-              <a:t>&gt; </a:t>
-            </a:r>
-            <a:r>
-              <a:rPr sz="1350" b="0">
-                <a:solidFill>
-                  <a:srgbClr val="D9ECF8"/>
+              <a:t>ВЕРДИКТ: ЧТО ЖЕ ВСЁ-ТАКИ ЛУЧШЕ?</a:t>
+            </a:r>
+          </a:p>
+        </p:txBody>
+      </p:sp>
+      <p:sp>
+        <p:nvSpPr>
+          <p:cNvPr id="6" name="TextBox 5"/>
+          <p:cNvSpPr txBox="1"/>
+          <p:nvPr/>
+        </p:nvSpPr>
+        <p:spPr>
+          <a:xfrm>
+            <a:off x="7498079" y="1920240"/>
+            <a:ext cx="4114800" cy="960120"/>
+          </a:xfrm>
+          <a:prstGeom prst="rect">
+            <a:avLst/>
+          </a:prstGeom>
+          <a:noFill/>
+        </p:spPr>
+        <p:txBody>
+          <a:bodyPr wrap="square" anchor="t">
+            <a:spAutoFit/>
+          </a:bodyPr>
+          <a:lstStyle/>
+          <a:p>
+            <a:pPr algn="l">
+              <a:lnSpc>
+                <a:spcPct val="100000"/>
+              </a:lnSpc>
+            </a:pPr>
+            <a:r>
+              <a:rPr sz="1250" b="1">
+                <a:solidFill>
+                  <a:srgbClr val="9AFF3D"/>
+                </a:solidFill>
+                <a:latin typeface="Consolas"/>
+              </a:rPr>
+              <a:t>★ АБСОЛЮТНЫЙ ЛИДЕР ДЛЯ 90% ПК:
+</a:t>
+            </a:r>
+            <a:r>
+              <a:rPr sz="1200" b="0">
+                <a:solidFill>
+                  <a:srgbClr val="E2F1FB"/>
                 </a:solidFill>
                 <a:latin typeface="Segoe UI"/>
               </a:rPr>
-              <a:t>Выбор технологии определяется балансом мощности TDP, габаритов шасси, бюджета и требований к шуму</a:t>
+              <a:t>Воздушный башенный кулер (6–8 трубок). Лучшее соотношение цена/надёжность/эффективность: не может протечь, служит 10+ лет.</a:t>
+            </a:r>
+          </a:p>
+        </p:txBody>
+      </p:sp>
+      <p:sp>
+        <p:nvSpPr>
+          <p:cNvPr id="7" name="TextBox 6"/>
+          <p:cNvSpPr txBox="1"/>
+          <p:nvPr/>
+        </p:nvSpPr>
+        <p:spPr>
+          <a:xfrm>
+            <a:off x="7498079" y="2926080"/>
+            <a:ext cx="4114800" cy="960120"/>
+          </a:xfrm>
+          <a:prstGeom prst="rect">
+            <a:avLst/>
+          </a:prstGeom>
+          <a:noFill/>
+        </p:spPr>
+        <p:txBody>
+          <a:bodyPr wrap="square" anchor="t">
+            <a:spAutoFit/>
+          </a:bodyPr>
+          <a:lstStyle/>
+          <a:p>
+            <a:pPr algn="l">
+              <a:lnSpc>
+                <a:spcPct val="100000"/>
+              </a:lnSpc>
+            </a:pPr>
+            <a:r>
+              <a:rPr sz="1250" b="1">
+                <a:solidFill>
+                  <a:srgbClr val="9AFF3D"/>
+                </a:solidFill>
+                <a:latin typeface="Consolas"/>
+              </a:rPr>
+              <a:t>★ ЛУЧШИЙ ВЫБОР ДЛЯ ГОРЯЧИХ ЦП (&gt;250 Вт):
+</a:t>
+            </a:r>
+            <a:r>
+              <a:rPr sz="1200" b="0">
+                <a:solidFill>
+                  <a:srgbClr val="E2F1FB"/>
+                </a:solidFill>
+                <a:latin typeface="Segoe UI"/>
+              </a:rPr>
+              <a:t>Моноблочная СЖО (AIO 280/360 мм). Идеальна для компактных корпусов и тяжёлого рендеринга без шума.</a:t>
+            </a:r>
+          </a:p>
+        </p:txBody>
+      </p:sp>
+      <p:sp>
+        <p:nvSpPr>
+          <p:cNvPr id="8" name="TextBox 7"/>
+          <p:cNvSpPr txBox="1"/>
+          <p:nvPr/>
+        </p:nvSpPr>
+        <p:spPr>
+          <a:xfrm>
+            <a:off x="7498079" y="3931920"/>
+            <a:ext cx="4114800" cy="960120"/>
+          </a:xfrm>
+          <a:prstGeom prst="rect">
+            <a:avLst/>
+          </a:prstGeom>
+          <a:noFill/>
+        </p:spPr>
+        <p:txBody>
+          <a:bodyPr wrap="square" anchor="t">
+            <a:spAutoFit/>
+          </a:bodyPr>
+          <a:lstStyle/>
+          <a:p>
+            <a:pPr algn="l">
+              <a:lnSpc>
+                <a:spcPct val="100000"/>
+              </a:lnSpc>
+            </a:pPr>
+            <a:r>
+              <a:rPr sz="1250" b="1">
+                <a:solidFill>
+                  <a:srgbClr val="9AFF3D"/>
+                </a:solidFill>
+                <a:latin typeface="Consolas"/>
+              </a:rPr>
+              <a:t>★ ЭТАЛОН ДЛЯ ЭНТУЗИАСТОВ (ЦП + ГП):
+</a:t>
+            </a:r>
+            <a:r>
+              <a:rPr sz="1200" b="0">
+                <a:solidFill>
+                  <a:srgbClr val="E2F1FB"/>
+                </a:solidFill>
+                <a:latin typeface="Segoe UI"/>
+              </a:rPr>
+              <a:t>Кастомный контур. Отводит свыше 600 Вт в абсолютной тишине, но требует регулярного ТО.</a:t>
+            </a:r>
+          </a:p>
+        </p:txBody>
+      </p:sp>
+      <p:sp>
+        <p:nvSpPr>
+          <p:cNvPr id="9" name="TextBox 8"/>
+          <p:cNvSpPr txBox="1"/>
+          <p:nvPr/>
+        </p:nvSpPr>
+        <p:spPr>
+          <a:xfrm>
+            <a:off x="7498079" y="4937760"/>
+            <a:ext cx="4114800" cy="960120"/>
+          </a:xfrm>
+          <a:prstGeom prst="rect">
+            <a:avLst/>
+          </a:prstGeom>
+          <a:noFill/>
+        </p:spPr>
+        <p:txBody>
+          <a:bodyPr wrap="square" anchor="t">
+            <a:spAutoFit/>
+          </a:bodyPr>
+          <a:lstStyle/>
+          <a:p>
+            <a:pPr algn="l">
+              <a:lnSpc>
+                <a:spcPct val="100000"/>
+              </a:lnSpc>
+            </a:pPr>
+            <a:r>
+              <a:rPr sz="1250" b="1">
+                <a:solidFill>
+                  <a:srgbClr val="9AFF3D"/>
+                </a:solidFill>
+                <a:latin typeface="Consolas"/>
+              </a:rPr>
+              <a:t>★ ПРОРЫВ ДЛЯ СЕРВЕРОВ И ЦОД:
+</a:t>
+            </a:r>
+            <a:r>
+              <a:rPr sz="1200" b="0">
+                <a:solidFill>
+                  <a:srgbClr val="E2F1FB"/>
+                </a:solidFill>
+                <a:latin typeface="Segoe UI"/>
+              </a:rPr>
+              <a:t>Иммерсионные ванны. Достигают PUE = 1,09 и рекордной плотности вычислений.</a:t>
+            </a:r>
+          </a:p>
+        </p:txBody>
+      </p:sp>
+      <p:sp>
+        <p:nvSpPr>
+          <p:cNvPr id="10" name="TextBox 9"/>
+          <p:cNvSpPr txBox="1"/>
+          <p:nvPr/>
+        </p:nvSpPr>
+        <p:spPr>
+          <a:xfrm>
+            <a:off x="658368" y="4325112"/>
+            <a:ext cx="6583680" cy="594360"/>
+          </a:xfrm>
+          <a:prstGeom prst="rect">
+            <a:avLst/>
+          </a:prstGeom>
+          <a:noFill/>
+        </p:spPr>
+        <p:txBody>
+          <a:bodyPr wrap="square" anchor="t">
+            <a:spAutoFit/>
+          </a:bodyPr>
+          <a:lstStyle/>
+          <a:p>
+            <a:pPr algn="l">
+              <a:lnSpc>
+                <a:spcPct val="100000"/>
+              </a:lnSpc>
+            </a:pPr>
+            <a:r>
+              <a:rPr sz="1350" b="1">
+                <a:solidFill>
+                  <a:srgbClr val="FFB020"/>
+                </a:solidFill>
+                <a:latin typeface="Consolas"/>
+              </a:rPr>
+              <a:t>⚡ ИТОГ: </a:t>
+            </a:r>
+            <a:r>
+              <a:rPr sz="1350" b="0">
+                <a:solidFill>
+                  <a:srgbClr val="D9ECF8"/>
+                </a:solidFill>
+                <a:latin typeface="Segoe UI"/>
+              </a:rPr>
+              <a:t>Итог: единого идеала нет, но для ПК стандарт надёжности — воздух, а для пиковых нагрузок — СЖО</a:t>
             </a:r>
           </a:p>
         </p:txBody>
@@ -12734,32 +12969,198 @@
                             </p:childTnLst>
                           </p:cTn>
                         </p:par>
-                      </p:childTnLst>
-                    </p:cTn>
-                  </p:par>
-                  <p:par>
-                    <p:cTn id="10" fill="hold">
-                      <p:stCondLst>
-                        <p:cond delay="indefinite"/>
-                      </p:stCondLst>
-                      <p:childTnLst>
                         <p:par>
-                          <p:cTn id="11" fill="hold">
+                          <p:cTn id="10" fill="hold">
                             <p:stCondLst>
-                              <p:cond delay="0"/>
+                              <p:cond delay="250"/>
                             </p:stCondLst>
                             <p:childTnLst>
                               <p:par>
-                                <p:cTn id="12" presetClass="entr" fill="hold" nodeType="clickEffect" presetID="10" presetSubtype="0">
+                                <p:cTn id="11" presetClass="entr" fill="hold" nodeType="afterEffect" presetID="10" presetSubtype="0">
                                   <p:stCondLst>
                                     <p:cond delay="0"/>
                                   </p:stCondLst>
                                   <p:childTnLst>
                                     <p:animEffect transition="in" filter="fade">
                                       <p:cBhvr>
-                                        <p:cTn id="13" dur="400"/>
+                                        <p:cTn id="12" dur="450"/>
                                         <p:tgtEl>
                                           <p:spTgt spid="5"/>
+                                        </p:tgtEl>
+                                      </p:cBhvr>
+                                    </p:animEffect>
+                                  </p:childTnLst>
+                                </p:cTn>
+                              </p:par>
+                            </p:childTnLst>
+                          </p:cTn>
+                        </p:par>
+                      </p:childTnLst>
+                    </p:cTn>
+                  </p:par>
+                  <p:par>
+                    <p:cTn id="13" fill="hold">
+                      <p:stCondLst>
+                        <p:cond delay="indefinite"/>
+                      </p:stCondLst>
+                      <p:childTnLst>
+                        <p:par>
+                          <p:cTn id="14" fill="hold">
+                            <p:stCondLst>
+                              <p:cond delay="0"/>
+                            </p:stCondLst>
+                            <p:childTnLst>
+                              <p:par>
+                                <p:cTn id="15" presetClass="entr" fill="hold" nodeType="clickEffect" presetID="2" presetSubtype="8">
+                                  <p:stCondLst>
+                                    <p:cond delay="0"/>
+                                  </p:stCondLst>
+                                  <p:childTnLst>
+                                    <p:animEffect transition="in" filter="fly(right)">
+                                      <p:cBhvr>
+                                        <p:cTn id="16" dur="400"/>
+                                        <p:tgtEl>
+                                          <p:spTgt spid="6"/>
+                                        </p:tgtEl>
+                                      </p:cBhvr>
+                                    </p:animEffect>
+                                  </p:childTnLst>
+                                </p:cTn>
+                              </p:par>
+                            </p:childTnLst>
+                          </p:cTn>
+                        </p:par>
+                      </p:childTnLst>
+                    </p:cTn>
+                  </p:par>
+                  <p:par>
+                    <p:cTn id="17" fill="hold">
+                      <p:stCondLst>
+                        <p:cond delay="indefinite"/>
+                      </p:stCondLst>
+                      <p:childTnLst>
+                        <p:par>
+                          <p:cTn id="18" fill="hold">
+                            <p:stCondLst>
+                              <p:cond delay="0"/>
+                            </p:stCondLst>
+                            <p:childTnLst>
+                              <p:par>
+                                <p:cTn id="19" presetClass="entr" fill="hold" nodeType="clickEffect" presetID="2" presetSubtype="8">
+                                  <p:stCondLst>
+                                    <p:cond delay="0"/>
+                                  </p:stCondLst>
+                                  <p:childTnLst>
+                                    <p:animEffect transition="in" filter="fly(right)">
+                                      <p:cBhvr>
+                                        <p:cTn id="20" dur="400"/>
+                                        <p:tgtEl>
+                                          <p:spTgt spid="7"/>
+                                        </p:tgtEl>
+                                      </p:cBhvr>
+                                    </p:animEffect>
+                                  </p:childTnLst>
+                                </p:cTn>
+                              </p:par>
+                            </p:childTnLst>
+                          </p:cTn>
+                        </p:par>
+                      </p:childTnLst>
+                    </p:cTn>
+                  </p:par>
+                  <p:par>
+                    <p:cTn id="21" fill="hold">
+                      <p:stCondLst>
+                        <p:cond delay="indefinite"/>
+                      </p:stCondLst>
+                      <p:childTnLst>
+                        <p:par>
+                          <p:cTn id="22" fill="hold">
+                            <p:stCondLst>
+                              <p:cond delay="0"/>
+                            </p:stCondLst>
+                            <p:childTnLst>
+                              <p:par>
+                                <p:cTn id="23" presetClass="entr" fill="hold" nodeType="clickEffect" presetID="2" presetSubtype="8">
+                                  <p:stCondLst>
+                                    <p:cond delay="0"/>
+                                  </p:stCondLst>
+                                  <p:childTnLst>
+                                    <p:animEffect transition="in" filter="fly(right)">
+                                      <p:cBhvr>
+                                        <p:cTn id="24" dur="400"/>
+                                        <p:tgtEl>
+                                          <p:spTgt spid="8"/>
+                                        </p:tgtEl>
+                                      </p:cBhvr>
+                                    </p:animEffect>
+                                  </p:childTnLst>
+                                </p:cTn>
+                              </p:par>
+                            </p:childTnLst>
+                          </p:cTn>
+                        </p:par>
+                      </p:childTnLst>
+                    </p:cTn>
+                  </p:par>
+                  <p:par>
+                    <p:cTn id="25" fill="hold">
+                      <p:stCondLst>
+                        <p:cond delay="indefinite"/>
+                      </p:stCondLst>
+                      <p:childTnLst>
+                        <p:par>
+                          <p:cTn id="26" fill="hold">
+                            <p:stCondLst>
+                              <p:cond delay="0"/>
+                            </p:stCondLst>
+                            <p:childTnLst>
+                              <p:par>
+                                <p:cTn id="27" presetClass="entr" fill="hold" nodeType="clickEffect" presetID="2" presetSubtype="8">
+                                  <p:stCondLst>
+                                    <p:cond delay="0"/>
+                                  </p:stCondLst>
+                                  <p:childTnLst>
+                                    <p:animEffect transition="in" filter="fly(right)">
+                                      <p:cBhvr>
+                                        <p:cTn id="28" dur="400"/>
+                                        <p:tgtEl>
+                                          <p:spTgt spid="9"/>
+                                        </p:tgtEl>
+                                      </p:cBhvr>
+                                    </p:animEffect>
+                                  </p:childTnLst>
+                                </p:cTn>
+                              </p:par>
+                            </p:childTnLst>
+                          </p:cTn>
+                        </p:par>
+                      </p:childTnLst>
+                    </p:cTn>
+                  </p:par>
+                  <p:par>
+                    <p:cTn id="29" fill="hold">
+                      <p:stCondLst>
+                        <p:cond delay="indefinite"/>
+                      </p:stCondLst>
+                      <p:childTnLst>
+                        <p:par>
+                          <p:cTn id="30" fill="hold">
+                            <p:stCondLst>
+                              <p:cond delay="0"/>
+                            </p:stCondLst>
+                            <p:childTnLst>
+                              <p:par>
+                                <p:cTn id="31" presetClass="entr" fill="hold" nodeType="clickEffect" presetID="22" presetSubtype="8">
+                                  <p:stCondLst>
+                                    <p:cond delay="0"/>
+                                  </p:stCondLst>
+                                  <p:childTnLst>
+                                    <p:animEffect transition="in" filter="wipe(right)">
+                                      <p:cBhvr>
+                                        <p:cTn id="32" dur="400"/>
+                                        <p:tgtEl>
+                                          <p:spTgt spid="10"/>
                                         </p:tgtEl>
                                       </p:cBhvr>
                                     </p:animEffect>
